--- a/semaine_08/420905_semaine8.pptx
+++ b/semaine_08/420905_semaine8.pptx
@@ -20,19 +20,16 @@
     <p:sldId id="305" r:id="rId17"/>
     <p:sldId id="313" r:id="rId18"/>
     <p:sldId id="314" r:id="rId19"/>
-    <p:sldId id="262" r:id="rId20"/>
-    <p:sldId id="315" r:id="rId21"/>
-    <p:sldId id="263" r:id="rId22"/>
-    <p:sldId id="292" r:id="rId23"/>
-    <p:sldId id="293" r:id="rId24"/>
-    <p:sldId id="316" r:id="rId25"/>
-    <p:sldId id="296" r:id="rId26"/>
-    <p:sldId id="295" r:id="rId27"/>
-    <p:sldId id="297" r:id="rId28"/>
-    <p:sldId id="309" r:id="rId29"/>
-    <p:sldId id="317" r:id="rId30"/>
-    <p:sldId id="318" r:id="rId31"/>
-    <p:sldId id="319" r:id="rId32"/>
+    <p:sldId id="292" r:id="rId20"/>
+    <p:sldId id="293" r:id="rId21"/>
+    <p:sldId id="316" r:id="rId22"/>
+    <p:sldId id="296" r:id="rId23"/>
+    <p:sldId id="295" r:id="rId24"/>
+    <p:sldId id="297" r:id="rId25"/>
+    <p:sldId id="309" r:id="rId26"/>
+    <p:sldId id="317" r:id="rId27"/>
+    <p:sldId id="318" r:id="rId28"/>
+    <p:sldId id="319" r:id="rId29"/>
   </p:sldIdLst>
   <p:sldSz cx="12192000" cy="6858000"/>
   <p:notesSz cx="6858000" cy="9144000"/>
@@ -1828,7 +1825,7 @@
           <a:p>
             <a:fld id="{CFA36C02-C10D-4F70-ADA5-0F3523AD6F2E}" type="datetimeFigureOut">
               <a:rPr lang="fr-CA" smtClean="0"/>
-              <a:t>2022-10-10</a:t>
+              <a:t>2022-10-11</a:t>
             </a:fld>
             <a:endParaRPr lang="fr-CA" dirty="0"/>
           </a:p>
@@ -3947,27 +3944,15 @@
             <a:pPr lvl="1"/>
             <a:r>
               <a:rPr lang="fr-CA" dirty="0"/>
-              <a:t> Permet de </a:t>
-            </a:r>
-            <a:r>
-              <a:rPr lang="fr-CA" u="sng"/>
-              <a:t>retirer</a:t>
+              <a:t> </a:t>
             </a:r>
             <a:r>
               <a:rPr lang="fr-CA"/>
-              <a:t> et </a:t>
-            </a:r>
-            <a:r>
-              <a:rPr lang="fr-CA" u="sng"/>
-              <a:t>d’ajouter</a:t>
-            </a:r>
-            <a:r>
-              <a:rPr lang="fr-CA"/>
-              <a:t> </a:t>
-            </a:r>
-            <a:r>
-              <a:rPr lang="fr-CA" dirty="0"/>
-              <a:t>des éléments dans un </a:t>
+              <a:t>Permet entre autre* de retirer des </a:t>
+            </a:r>
+            <a:r>
+              <a:rPr lang="fr-CA" dirty="0"/>
+              <a:t>éléments dans un </a:t>
             </a:r>
             <a:r>
               <a:rPr lang="fr-CA" b="1" dirty="0"/>
@@ -3977,20 +3962,16 @@
           <a:p>
             <a:pPr lvl="2"/>
             <a:r>
-              <a:rPr lang="fr-CA" dirty="0"/>
-              <a:t> Et pas juste à la fin comme </a:t>
-            </a:r>
-            <a:r>
-              <a:rPr lang="fr-CA" dirty="0">
-                <a:solidFill>
-                  <a:srgbClr val="FA4098"/>
-                </a:solidFill>
-              </a:rPr>
-              <a:t>push()</a:t>
-            </a:r>
-            <a:r>
-              <a:rPr lang="fr-CA" dirty="0"/>
-              <a:t> et </a:t>
+              <a:rPr lang="fr-CA"/>
+              <a:t> Pas </a:t>
+            </a:r>
+            <a:r>
+              <a:rPr lang="fr-CA" dirty="0"/>
+              <a:t>juste à la </a:t>
+            </a:r>
+            <a:r>
+              <a:rPr lang="fr-CA"/>
+              <a:t>fin comme </a:t>
             </a:r>
             <a:r>
               <a:rPr lang="fr-CA" dirty="0">
@@ -4473,6 +4454,45 @@
           </a:fontRef>
         </p:style>
       </p:cxnSp>
+      <p:sp>
+        <p:nvSpPr>
+          <p:cNvPr id="6" name="ZoneTexte 5">
+            <a:extLst>
+              <a:ext uri="{FF2B5EF4-FFF2-40B4-BE49-F238E27FC236}">
+                <a16:creationId xmlns:a16="http://schemas.microsoft.com/office/drawing/2014/main" id="{646E1B78-6A4C-4E0A-962D-1FB9D97141F3}"/>
+              </a:ext>
+            </a:extLst>
+          </p:cNvPr>
+          <p:cNvSpPr txBox="1"/>
+          <p:nvPr/>
+        </p:nvSpPr>
+        <p:spPr>
+          <a:xfrm>
+            <a:off x="0" y="6550223"/>
+            <a:ext cx="11934774" cy="307777"/>
+          </a:xfrm>
+          <a:prstGeom prst="rect">
+            <a:avLst/>
+          </a:prstGeom>
+          <a:noFill/>
+        </p:spPr>
+        <p:txBody>
+          <a:bodyPr wrap="square" rtlCol="0">
+            <a:spAutoFit/>
+          </a:bodyPr>
+          <a:lstStyle/>
+          <a:p>
+            <a:r>
+              <a:rPr lang="fr-CA" sz="1400">
+                <a:solidFill>
+                  <a:srgbClr val="739CD1"/>
+                </a:solidFill>
+              </a:rPr>
+              <a:t>*splice() permet aussi d’ajouter des éléments, mais nous l’utiliserons seulement pour en retirer dans ce cours.</a:t>
+            </a:r>
+          </a:p>
+        </p:txBody>
+      </p:sp>
     </p:spTree>
     <p:extLst>
       <p:ext uri="{BB962C8B-B14F-4D97-AF65-F5344CB8AC3E}">
@@ -4540,23 +4560,12 @@
           <a:p>
             <a:pPr lvl="1"/>
             <a:r>
-              <a:rPr lang="fr-CA" dirty="0"/>
-              <a:t> </a:t>
-            </a:r>
-            <a:r>
-              <a:rPr lang="fr-CA" b="1" dirty="0"/>
-              <a:t>Retirer</a:t>
-            </a:r>
-            <a:r>
-              <a:rPr lang="fr-CA" dirty="0"/>
-              <a:t> des éléments</a:t>
-            </a:r>
-          </a:p>
-          <a:p>
-            <a:pPr lvl="1"/>
-            <a:r>
-              <a:rPr lang="fr-CA" dirty="0"/>
-              <a:t> Autre Exemple :</a:t>
+              <a:rPr lang="fr-CA"/>
+              <a:t> Autre </a:t>
+            </a:r>
+            <a:r>
+              <a:rPr lang="fr-CA" dirty="0"/>
+              <a:t>Exemple :</a:t>
             </a:r>
           </a:p>
           <a:p>
@@ -4784,2425 +4793,6 @@
 </file>
 
 <file path=ppt/slides/slide16.xml><?xml version="1.0" encoding="utf-8"?>
-<p:sld xmlns:a="http://schemas.openxmlformats.org/drawingml/2006/main" xmlns:r="http://schemas.openxmlformats.org/officeDocument/2006/relationships" xmlns:p="http://schemas.openxmlformats.org/presentationml/2006/main">
-  <p:cSld>
-    <p:spTree>
-      <p:nvGrpSpPr>
-        <p:cNvPr id="1" name=""/>
-        <p:cNvGrpSpPr/>
-        <p:nvPr/>
-      </p:nvGrpSpPr>
-      <p:grpSpPr>
-        <a:xfrm>
-          <a:off x="0" y="0"/>
-          <a:ext cx="0" cy="0"/>
-          <a:chOff x="0" y="0"/>
-          <a:chExt cx="0" cy="0"/>
-        </a:xfrm>
-      </p:grpSpPr>
-      <p:sp>
-        <p:nvSpPr>
-          <p:cNvPr id="2" name="Espace réservé du contenu 1">
-            <a:extLst>
-              <a:ext uri="{FF2B5EF4-FFF2-40B4-BE49-F238E27FC236}">
-                <a16:creationId xmlns:a16="http://schemas.microsoft.com/office/drawing/2014/main" id="{48AD38C4-312E-4E09-9859-DEBFDBE180A2}"/>
-              </a:ext>
-            </a:extLst>
-          </p:cNvPr>
-          <p:cNvSpPr>
-            <a:spLocks noGrp="1"/>
-          </p:cNvSpPr>
-          <p:nvPr>
-            <p:ph idx="1"/>
-          </p:nvPr>
-        </p:nvSpPr>
-        <p:spPr/>
-        <p:txBody>
-          <a:bodyPr/>
-          <a:lstStyle/>
-          <a:p>
-            <a:r>
-              <a:rPr lang="fr-CA" dirty="0"/>
-              <a:t> </a:t>
-            </a:r>
-            <a:r>
-              <a:rPr lang="fr-CA" dirty="0">
-                <a:solidFill>
-                  <a:srgbClr val="FA4098"/>
-                </a:solidFill>
-              </a:rPr>
-              <a:t>splice()</a:t>
-            </a:r>
-            <a:endParaRPr lang="fr-CA" dirty="0"/>
-          </a:p>
-          <a:p>
-            <a:pPr lvl="1"/>
-            <a:r>
-              <a:rPr lang="fr-CA" dirty="0"/>
-              <a:t> </a:t>
-            </a:r>
-            <a:r>
-              <a:rPr lang="fr-CA" b="1" dirty="0"/>
-              <a:t>Ajouter</a:t>
-            </a:r>
-            <a:r>
-              <a:rPr lang="fr-CA" dirty="0"/>
-              <a:t> des éléments</a:t>
-            </a:r>
-          </a:p>
-          <a:p>
-            <a:pPr lvl="1"/>
-            <a:r>
-              <a:rPr lang="fr-CA" dirty="0"/>
-              <a:t> Syntaxe pour ajouter des éléments</a:t>
-            </a:r>
-          </a:p>
-          <a:p>
-            <a:pPr marL="0" indent="0" algn="ctr">
-              <a:buNone/>
-            </a:pPr>
-            <a:r>
-              <a:rPr lang="fr-CA" sz="2000" b="1">
-                <a:latin typeface="Courier New" panose="02070309020205020404" pitchFamily="49" charset="0"/>
-                <a:cs typeface="Courier New" panose="02070309020205020404" pitchFamily="49" charset="0"/>
-              </a:rPr>
-              <a:t>monTableau</a:t>
-            </a:r>
-            <a:r>
-              <a:rPr lang="fr-CA" sz="2000" b="1" dirty="0">
-                <a:latin typeface="Courier New" panose="02070309020205020404" pitchFamily="49" charset="0"/>
-                <a:cs typeface="Courier New" panose="02070309020205020404" pitchFamily="49" charset="0"/>
-              </a:rPr>
-              <a:t>.</a:t>
-            </a:r>
-            <a:r>
-              <a:rPr lang="fr-CA" sz="2000" b="1" dirty="0">
-                <a:solidFill>
-                  <a:srgbClr val="FA4098"/>
-                </a:solidFill>
-                <a:latin typeface="Courier New" panose="02070309020205020404" pitchFamily="49" charset="0"/>
-                <a:cs typeface="Courier New" panose="02070309020205020404" pitchFamily="49" charset="0"/>
-              </a:rPr>
-              <a:t>splice</a:t>
-            </a:r>
-            <a:r>
-              <a:rPr lang="fr-CA" sz="2000" b="1" dirty="0">
-                <a:latin typeface="Courier New" panose="02070309020205020404" pitchFamily="49" charset="0"/>
-                <a:cs typeface="Courier New" panose="02070309020205020404" pitchFamily="49" charset="0"/>
-              </a:rPr>
-              <a:t>(</a:t>
-            </a:r>
-            <a:r>
-              <a:rPr lang="fr-CA" sz="2000" b="1" dirty="0">
-                <a:solidFill>
-                  <a:srgbClr val="FA4098"/>
-                </a:solidFill>
-                <a:latin typeface="Courier New" panose="02070309020205020404" pitchFamily="49" charset="0"/>
-                <a:cs typeface="Courier New" panose="02070309020205020404" pitchFamily="49" charset="0"/>
-              </a:rPr>
-              <a:t>index</a:t>
-            </a:r>
-            <a:r>
-              <a:rPr lang="fr-CA" sz="2000" b="1" dirty="0">
-                <a:latin typeface="Courier New" panose="02070309020205020404" pitchFamily="49" charset="0"/>
-                <a:cs typeface="Courier New" panose="02070309020205020404" pitchFamily="49" charset="0"/>
-              </a:rPr>
-              <a:t>, </a:t>
-            </a:r>
-            <a:r>
-              <a:rPr lang="fr-CA" sz="2000" b="1" dirty="0">
-                <a:solidFill>
-                  <a:srgbClr val="FA4098"/>
-                </a:solidFill>
-                <a:latin typeface="Courier New" panose="02070309020205020404" pitchFamily="49" charset="0"/>
-                <a:cs typeface="Courier New" panose="02070309020205020404" pitchFamily="49" charset="0"/>
-              </a:rPr>
-              <a:t>nbRetirer</a:t>
-            </a:r>
-            <a:r>
-              <a:rPr lang="fr-CA" sz="2000" b="1" dirty="0">
-                <a:latin typeface="Courier New" panose="02070309020205020404" pitchFamily="49" charset="0"/>
-                <a:cs typeface="Courier New" panose="02070309020205020404" pitchFamily="49" charset="0"/>
-              </a:rPr>
-              <a:t>,</a:t>
-            </a:r>
-            <a:r>
-              <a:rPr lang="fr-CA" sz="2000" b="1" dirty="0">
-                <a:solidFill>
-                  <a:srgbClr val="FA4098"/>
-                </a:solidFill>
-                <a:latin typeface="Courier New" panose="02070309020205020404" pitchFamily="49" charset="0"/>
-                <a:cs typeface="Courier New" panose="02070309020205020404" pitchFamily="49" charset="0"/>
-              </a:rPr>
-              <a:t> valeur1</a:t>
-            </a:r>
-            <a:r>
-              <a:rPr lang="fr-CA" sz="2000" b="1" dirty="0">
-                <a:latin typeface="Courier New" panose="02070309020205020404" pitchFamily="49" charset="0"/>
-                <a:cs typeface="Courier New" panose="02070309020205020404" pitchFamily="49" charset="0"/>
-              </a:rPr>
-              <a:t>,</a:t>
-            </a:r>
-            <a:r>
-              <a:rPr lang="fr-CA" sz="2000" b="1" dirty="0">
-                <a:solidFill>
-                  <a:srgbClr val="FA4098"/>
-                </a:solidFill>
-                <a:latin typeface="Courier New" panose="02070309020205020404" pitchFamily="49" charset="0"/>
-                <a:cs typeface="Courier New" panose="02070309020205020404" pitchFamily="49" charset="0"/>
-              </a:rPr>
-              <a:t> valeur2</a:t>
-            </a:r>
-            <a:r>
-              <a:rPr lang="fr-CA" sz="2000" b="1" dirty="0">
-                <a:latin typeface="Courier New" panose="02070309020205020404" pitchFamily="49" charset="0"/>
-                <a:cs typeface="Courier New" panose="02070309020205020404" pitchFamily="49" charset="0"/>
-              </a:rPr>
-              <a:t>,</a:t>
-            </a:r>
-            <a:r>
-              <a:rPr lang="fr-CA" sz="2000" b="1" dirty="0">
-                <a:solidFill>
-                  <a:srgbClr val="FA4098"/>
-                </a:solidFill>
-                <a:latin typeface="Courier New" panose="02070309020205020404" pitchFamily="49" charset="0"/>
-                <a:cs typeface="Courier New" panose="02070309020205020404" pitchFamily="49" charset="0"/>
-              </a:rPr>
-              <a:t> ...</a:t>
-            </a:r>
-            <a:r>
-              <a:rPr lang="fr-CA" sz="2000" b="1" dirty="0">
-                <a:latin typeface="Courier New" panose="02070309020205020404" pitchFamily="49" charset="0"/>
-                <a:cs typeface="Courier New" panose="02070309020205020404" pitchFamily="49" charset="0"/>
-              </a:rPr>
-              <a:t>)</a:t>
-            </a:r>
-          </a:p>
-          <a:p>
-            <a:pPr marL="0" indent="0" algn="ctr">
-              <a:buNone/>
-            </a:pPr>
-            <a:endParaRPr lang="fr-CA" sz="2000" b="1" dirty="0">
-              <a:latin typeface="Courier New" panose="02070309020205020404" pitchFamily="49" charset="0"/>
-              <a:cs typeface="Courier New" panose="02070309020205020404" pitchFamily="49" charset="0"/>
-            </a:endParaRPr>
-          </a:p>
-          <a:p>
-            <a:pPr marL="0" indent="0" algn="ctr">
-              <a:buNone/>
-            </a:pPr>
-            <a:endParaRPr lang="fr-CA" sz="2000" b="1" dirty="0">
-              <a:latin typeface="Courier New" panose="02070309020205020404" pitchFamily="49" charset="0"/>
-              <a:cs typeface="Courier New" panose="02070309020205020404" pitchFamily="49" charset="0"/>
-            </a:endParaRPr>
-          </a:p>
-          <a:p>
-            <a:pPr lvl="1"/>
-            <a:r>
-              <a:rPr lang="fr-CA" dirty="0"/>
-              <a:t> Exemple :</a:t>
-            </a:r>
-          </a:p>
-          <a:p>
-            <a:pPr marL="914400" lvl="2" indent="0">
-              <a:buNone/>
-            </a:pPr>
-            <a:r>
-              <a:rPr lang="fr-CA" sz="1600" b="1" dirty="0">
-                <a:solidFill>
-                  <a:schemeClr val="tx1"/>
-                </a:solidFill>
-                <a:latin typeface="Courier New" panose="02070309020205020404" pitchFamily="49" charset="0"/>
-                <a:cs typeface="Courier New" panose="02070309020205020404" pitchFamily="49" charset="0"/>
-              </a:rPr>
-              <a:t>let </a:t>
-            </a:r>
-            <a:r>
-              <a:rPr lang="fr-CA" sz="1600" b="1" dirty="0">
-                <a:solidFill>
-                  <a:schemeClr val="accent6"/>
-                </a:solidFill>
-                <a:latin typeface="Courier New" panose="02070309020205020404" pitchFamily="49" charset="0"/>
-                <a:cs typeface="Courier New" panose="02070309020205020404" pitchFamily="49" charset="0"/>
-              </a:rPr>
-              <a:t>couleurs</a:t>
-            </a:r>
-            <a:r>
-              <a:rPr lang="fr-CA" sz="1600" b="1" dirty="0">
-                <a:solidFill>
-                  <a:schemeClr val="tx1"/>
-                </a:solidFill>
-                <a:latin typeface="Courier New" panose="02070309020205020404" pitchFamily="49" charset="0"/>
-                <a:cs typeface="Courier New" panose="02070309020205020404" pitchFamily="49" charset="0"/>
-              </a:rPr>
-              <a:t> = ["Bleu", "Rouge", "Jaune"];</a:t>
-            </a:r>
-          </a:p>
-          <a:p>
-            <a:pPr marL="914400" lvl="2" indent="0">
-              <a:buNone/>
-            </a:pPr>
-            <a:r>
-              <a:rPr lang="fr-CA" sz="1600" b="1" dirty="0">
-                <a:solidFill>
-                  <a:schemeClr val="accent6"/>
-                </a:solidFill>
-                <a:latin typeface="Courier New" panose="02070309020205020404" pitchFamily="49" charset="0"/>
-                <a:cs typeface="Courier New" panose="02070309020205020404" pitchFamily="49" charset="0"/>
-              </a:rPr>
-              <a:t>couleurs</a:t>
-            </a:r>
-            <a:r>
-              <a:rPr lang="fr-CA" sz="1600" b="1" dirty="0">
-                <a:solidFill>
-                  <a:schemeClr val="tx1"/>
-                </a:solidFill>
-                <a:latin typeface="Courier New" panose="02070309020205020404" pitchFamily="49" charset="0"/>
-                <a:cs typeface="Courier New" panose="02070309020205020404" pitchFamily="49" charset="0"/>
-              </a:rPr>
-              <a:t>.</a:t>
-            </a:r>
-            <a:r>
-              <a:rPr lang="fr-CA" sz="1600" b="1" dirty="0">
-                <a:solidFill>
-                  <a:srgbClr val="C00000"/>
-                </a:solidFill>
-                <a:latin typeface="Courier New" panose="02070309020205020404" pitchFamily="49" charset="0"/>
-                <a:cs typeface="Courier New" panose="02070309020205020404" pitchFamily="49" charset="0"/>
-              </a:rPr>
-              <a:t>splice</a:t>
-            </a:r>
-            <a:r>
-              <a:rPr lang="fr-CA" sz="1600" b="1" dirty="0">
-                <a:solidFill>
-                  <a:schemeClr val="tx1"/>
-                </a:solidFill>
-                <a:latin typeface="Courier New" panose="02070309020205020404" pitchFamily="49" charset="0"/>
-                <a:cs typeface="Courier New" panose="02070309020205020404" pitchFamily="49" charset="0"/>
-              </a:rPr>
-              <a:t>(</a:t>
-            </a:r>
-            <a:r>
-              <a:rPr lang="fr-CA" sz="1600" b="1" dirty="0">
-                <a:solidFill>
-                  <a:srgbClr val="FA4098"/>
-                </a:solidFill>
-                <a:latin typeface="Courier New" panose="02070309020205020404" pitchFamily="49" charset="0"/>
-                <a:cs typeface="Courier New" panose="02070309020205020404" pitchFamily="49" charset="0"/>
-              </a:rPr>
-              <a:t>1</a:t>
-            </a:r>
-            <a:r>
-              <a:rPr lang="fr-CA" sz="1600" b="1" dirty="0">
-                <a:solidFill>
-                  <a:schemeClr val="tx1"/>
-                </a:solidFill>
-                <a:latin typeface="Courier New" panose="02070309020205020404" pitchFamily="49" charset="0"/>
-                <a:cs typeface="Courier New" panose="02070309020205020404" pitchFamily="49" charset="0"/>
-              </a:rPr>
-              <a:t>, </a:t>
-            </a:r>
-            <a:r>
-              <a:rPr lang="fr-CA" sz="1600" b="1" dirty="0">
-                <a:solidFill>
-                  <a:srgbClr val="FA4098"/>
-                </a:solidFill>
-                <a:latin typeface="Courier New" panose="02070309020205020404" pitchFamily="49" charset="0"/>
-                <a:cs typeface="Courier New" panose="02070309020205020404" pitchFamily="49" charset="0"/>
-              </a:rPr>
-              <a:t>0</a:t>
-            </a:r>
-            <a:r>
-              <a:rPr lang="fr-CA" sz="1600" b="1" dirty="0">
-                <a:solidFill>
-                  <a:schemeClr val="tx1"/>
-                </a:solidFill>
-                <a:latin typeface="Courier New" panose="02070309020205020404" pitchFamily="49" charset="0"/>
-                <a:cs typeface="Courier New" panose="02070309020205020404" pitchFamily="49" charset="0"/>
-              </a:rPr>
-              <a:t>,</a:t>
-            </a:r>
-            <a:r>
-              <a:rPr lang="fr-CA" sz="1600" b="1" dirty="0">
-                <a:solidFill>
-                  <a:srgbClr val="FA4098"/>
-                </a:solidFill>
-                <a:latin typeface="Courier New" panose="02070309020205020404" pitchFamily="49" charset="0"/>
-                <a:cs typeface="Courier New" panose="02070309020205020404" pitchFamily="49" charset="0"/>
-              </a:rPr>
-              <a:t> "Rose"</a:t>
-            </a:r>
-            <a:r>
-              <a:rPr lang="fr-CA" sz="1600" b="1" dirty="0">
-                <a:solidFill>
-                  <a:schemeClr val="tx1"/>
-                </a:solidFill>
-                <a:latin typeface="Courier New" panose="02070309020205020404" pitchFamily="49" charset="0"/>
-                <a:cs typeface="Courier New" panose="02070309020205020404" pitchFamily="49" charset="0"/>
-              </a:rPr>
-              <a:t>,</a:t>
-            </a:r>
-            <a:r>
-              <a:rPr lang="fr-CA" sz="1600" b="1" dirty="0">
-                <a:solidFill>
-                  <a:srgbClr val="FA4098"/>
-                </a:solidFill>
-                <a:latin typeface="Courier New" panose="02070309020205020404" pitchFamily="49" charset="0"/>
-                <a:cs typeface="Courier New" panose="02070309020205020404" pitchFamily="49" charset="0"/>
-              </a:rPr>
-              <a:t> "Turquoise"</a:t>
-            </a:r>
-            <a:r>
-              <a:rPr lang="fr-CA" sz="1600" b="1" dirty="0">
-                <a:solidFill>
-                  <a:schemeClr val="tx1"/>
-                </a:solidFill>
-                <a:latin typeface="Courier New" panose="02070309020205020404" pitchFamily="49" charset="0"/>
-                <a:cs typeface="Courier New" panose="02070309020205020404" pitchFamily="49" charset="0"/>
-              </a:rPr>
-              <a:t>);</a:t>
-            </a:r>
-          </a:p>
-          <a:p>
-            <a:pPr marL="914400" lvl="2" indent="0">
-              <a:buNone/>
-            </a:pPr>
-            <a:r>
-              <a:rPr lang="fr-CA" sz="1600" b="1" dirty="0">
-                <a:solidFill>
-                  <a:schemeClr val="bg1">
-                    <a:lumMod val="50000"/>
-                  </a:schemeClr>
-                </a:solidFill>
-                <a:latin typeface="Courier New" panose="02070309020205020404" pitchFamily="49" charset="0"/>
-                <a:cs typeface="Courier New" panose="02070309020205020404" pitchFamily="49" charset="0"/>
-              </a:rPr>
-              <a:t>// couleurs vaut maintenant ["Bleu", "Rose", "Turquoise", "Rouge", "Jaune"]</a:t>
-            </a:r>
-          </a:p>
-          <a:p>
-            <a:pPr marL="0" indent="0">
-              <a:buNone/>
-            </a:pPr>
-            <a:endParaRPr lang="fr-CA" sz="2000" b="1" dirty="0">
-              <a:latin typeface="Courier New" panose="02070309020205020404" pitchFamily="49" charset="0"/>
-              <a:cs typeface="Courier New" panose="02070309020205020404" pitchFamily="49" charset="0"/>
-            </a:endParaRPr>
-          </a:p>
-          <a:p>
-            <a:pPr lvl="1"/>
-            <a:endParaRPr lang="fr-CA" dirty="0"/>
-          </a:p>
-        </p:txBody>
-      </p:sp>
-      <p:sp>
-        <p:nvSpPr>
-          <p:cNvPr id="3" name="Titre 2">
-            <a:extLst>
-              <a:ext uri="{FF2B5EF4-FFF2-40B4-BE49-F238E27FC236}">
-                <a16:creationId xmlns:a16="http://schemas.microsoft.com/office/drawing/2014/main" id="{65F729F3-756E-4481-B6E0-C5186C398E40}"/>
-              </a:ext>
-            </a:extLst>
-          </p:cNvPr>
-          <p:cNvSpPr>
-            <a:spLocks noGrp="1"/>
-          </p:cNvSpPr>
-          <p:nvPr>
-            <p:ph type="title"/>
-          </p:nvPr>
-        </p:nvSpPr>
-        <p:spPr/>
-        <p:txBody>
-          <a:bodyPr/>
-          <a:lstStyle/>
-          <a:p>
-            <a:r>
-              <a:rPr lang="fr-CA" dirty="0"/>
-              <a:t>Splice</a:t>
-            </a:r>
-          </a:p>
-        </p:txBody>
-      </p:sp>
-      <p:sp>
-        <p:nvSpPr>
-          <p:cNvPr id="4" name="ZoneTexte 3">
-            <a:extLst>
-              <a:ext uri="{FF2B5EF4-FFF2-40B4-BE49-F238E27FC236}">
-                <a16:creationId xmlns:a16="http://schemas.microsoft.com/office/drawing/2014/main" id="{E2EF0EFC-494B-4E6E-9669-C6EAFC371544}"/>
-              </a:ext>
-            </a:extLst>
-          </p:cNvPr>
-          <p:cNvSpPr txBox="1"/>
-          <p:nvPr/>
-        </p:nvSpPr>
-        <p:spPr>
-          <a:xfrm>
-            <a:off x="1658112" y="3041976"/>
-            <a:ext cx="2523744" cy="338554"/>
-          </a:xfrm>
-          <a:prstGeom prst="rect">
-            <a:avLst/>
-          </a:prstGeom>
-          <a:noFill/>
-        </p:spPr>
-        <p:txBody>
-          <a:bodyPr wrap="square" rtlCol="0">
-            <a:spAutoFit/>
-          </a:bodyPr>
-          <a:lstStyle/>
-          <a:p>
-            <a:r>
-              <a:rPr lang="fr-CA" sz="1600" dirty="0">
-                <a:solidFill>
-                  <a:srgbClr val="FA4098"/>
-                </a:solidFill>
-              </a:rPr>
-              <a:t>Premier élément décalé</a:t>
-            </a:r>
-          </a:p>
-        </p:txBody>
-      </p:sp>
-      <p:sp>
-        <p:nvSpPr>
-          <p:cNvPr id="5" name="ZoneTexte 4">
-            <a:extLst>
-              <a:ext uri="{FF2B5EF4-FFF2-40B4-BE49-F238E27FC236}">
-                <a16:creationId xmlns:a16="http://schemas.microsoft.com/office/drawing/2014/main" id="{875822B6-EBBD-4D56-8AE8-C1246602F73B}"/>
-              </a:ext>
-            </a:extLst>
-          </p:cNvPr>
-          <p:cNvSpPr txBox="1"/>
-          <p:nvPr/>
-        </p:nvSpPr>
-        <p:spPr>
-          <a:xfrm>
-            <a:off x="4056888" y="3045024"/>
-            <a:ext cx="3532632" cy="584775"/>
-          </a:xfrm>
-          <a:prstGeom prst="rect">
-            <a:avLst/>
-          </a:prstGeom>
-          <a:noFill/>
-        </p:spPr>
-        <p:txBody>
-          <a:bodyPr wrap="square" rtlCol="0">
-            <a:spAutoFit/>
-          </a:bodyPr>
-          <a:lstStyle/>
-          <a:p>
-            <a:r>
-              <a:rPr lang="fr-CA" sz="1600" dirty="0">
-                <a:solidFill>
-                  <a:srgbClr val="FA4098"/>
-                </a:solidFill>
-              </a:rPr>
-              <a:t>Combien d’élément on retire au total ?</a:t>
-            </a:r>
-          </a:p>
-          <a:p>
-            <a:pPr algn="ctr"/>
-            <a:r>
-              <a:rPr lang="fr-CA" sz="1600" dirty="0">
-                <a:solidFill>
-                  <a:srgbClr val="FA4098"/>
-                </a:solidFill>
-              </a:rPr>
-              <a:t>Ceci doit être 0 !</a:t>
-            </a:r>
-          </a:p>
-        </p:txBody>
-      </p:sp>
-      <p:cxnSp>
-        <p:nvCxnSpPr>
-          <p:cNvPr id="6" name="Connecteur droit avec flèche 5">
-            <a:extLst>
-              <a:ext uri="{FF2B5EF4-FFF2-40B4-BE49-F238E27FC236}">
-                <a16:creationId xmlns:a16="http://schemas.microsoft.com/office/drawing/2014/main" id="{154DEA66-BF6C-4DAB-815E-E9F091CC41B3}"/>
-              </a:ext>
-            </a:extLst>
-          </p:cNvPr>
-          <p:cNvCxnSpPr>
-            <a:cxnSpLocks/>
-          </p:cNvCxnSpPr>
-          <p:nvPr/>
-        </p:nvCxnSpPr>
-        <p:spPr>
-          <a:xfrm flipV="1">
-            <a:off x="3596640" y="2775210"/>
-            <a:ext cx="1048512" cy="266766"/>
-          </a:xfrm>
-          <a:prstGeom prst="straightConnector1">
-            <a:avLst/>
-          </a:prstGeom>
-          <a:ln w="38100">
-            <a:solidFill>
-              <a:srgbClr val="FA4098"/>
-            </a:solidFill>
-            <a:tailEnd type="triangle"/>
-          </a:ln>
-        </p:spPr>
-        <p:style>
-          <a:lnRef idx="1">
-            <a:schemeClr val="accent1"/>
-          </a:lnRef>
-          <a:fillRef idx="0">
-            <a:schemeClr val="accent1"/>
-          </a:fillRef>
-          <a:effectRef idx="0">
-            <a:schemeClr val="accent1"/>
-          </a:effectRef>
-          <a:fontRef idx="minor">
-            <a:schemeClr val="tx1"/>
-          </a:fontRef>
-        </p:style>
-      </p:cxnSp>
-      <p:cxnSp>
-        <p:nvCxnSpPr>
-          <p:cNvPr id="7" name="Connecteur droit avec flèche 6">
-            <a:extLst>
-              <a:ext uri="{FF2B5EF4-FFF2-40B4-BE49-F238E27FC236}">
-                <a16:creationId xmlns:a16="http://schemas.microsoft.com/office/drawing/2014/main" id="{6E2A7637-392F-4C98-A50C-424E13658F81}"/>
-              </a:ext>
-            </a:extLst>
-          </p:cNvPr>
-          <p:cNvCxnSpPr>
-            <a:cxnSpLocks/>
-            <a:stCxn id="5" idx="0"/>
-          </p:cNvCxnSpPr>
-          <p:nvPr/>
-        </p:nvCxnSpPr>
-        <p:spPr>
-          <a:xfrm flipV="1">
-            <a:off x="5823204" y="2775210"/>
-            <a:ext cx="230124" cy="269814"/>
-          </a:xfrm>
-          <a:prstGeom prst="straightConnector1">
-            <a:avLst/>
-          </a:prstGeom>
-          <a:ln w="38100">
-            <a:solidFill>
-              <a:srgbClr val="FA4098"/>
-            </a:solidFill>
-            <a:tailEnd type="triangle"/>
-          </a:ln>
-        </p:spPr>
-        <p:style>
-          <a:lnRef idx="1">
-            <a:schemeClr val="accent1"/>
-          </a:lnRef>
-          <a:fillRef idx="0">
-            <a:schemeClr val="accent1"/>
-          </a:fillRef>
-          <a:effectRef idx="0">
-            <a:schemeClr val="accent1"/>
-          </a:effectRef>
-          <a:fontRef idx="minor">
-            <a:schemeClr val="tx1"/>
-          </a:fontRef>
-        </p:style>
-      </p:cxnSp>
-      <p:sp>
-        <p:nvSpPr>
-          <p:cNvPr id="11" name="ZoneTexte 10">
-            <a:extLst>
-              <a:ext uri="{FF2B5EF4-FFF2-40B4-BE49-F238E27FC236}">
-                <a16:creationId xmlns:a16="http://schemas.microsoft.com/office/drawing/2014/main" id="{5784E2F1-8A02-476A-AF12-0D7D7D4AE51E}"/>
-              </a:ext>
-            </a:extLst>
-          </p:cNvPr>
-          <p:cNvSpPr txBox="1"/>
-          <p:nvPr/>
-        </p:nvSpPr>
-        <p:spPr>
-          <a:xfrm>
-            <a:off x="8049216" y="3041976"/>
-            <a:ext cx="3532632" cy="338554"/>
-          </a:xfrm>
-          <a:prstGeom prst="rect">
-            <a:avLst/>
-          </a:prstGeom>
-          <a:noFill/>
-        </p:spPr>
-        <p:txBody>
-          <a:bodyPr wrap="square" rtlCol="0">
-            <a:spAutoFit/>
-          </a:bodyPr>
-          <a:lstStyle/>
-          <a:p>
-            <a:r>
-              <a:rPr lang="fr-CA" sz="1600" dirty="0">
-                <a:solidFill>
-                  <a:srgbClr val="FA4098"/>
-                </a:solidFill>
-              </a:rPr>
-              <a:t>Valeurs à ajouter dans le tableau.</a:t>
-            </a:r>
-          </a:p>
-        </p:txBody>
-      </p:sp>
-      <p:cxnSp>
-        <p:nvCxnSpPr>
-          <p:cNvPr id="12" name="Connecteur droit avec flèche 11">
-            <a:extLst>
-              <a:ext uri="{FF2B5EF4-FFF2-40B4-BE49-F238E27FC236}">
-                <a16:creationId xmlns:a16="http://schemas.microsoft.com/office/drawing/2014/main" id="{4B1E9BCC-F0CD-4D74-9839-52A558442699}"/>
-              </a:ext>
-            </a:extLst>
-          </p:cNvPr>
-          <p:cNvCxnSpPr>
-            <a:cxnSpLocks/>
-          </p:cNvCxnSpPr>
-          <p:nvPr/>
-        </p:nvCxnSpPr>
-        <p:spPr>
-          <a:xfrm flipH="1" flipV="1">
-            <a:off x="8049216" y="2775210"/>
-            <a:ext cx="998772" cy="294270"/>
-          </a:xfrm>
-          <a:prstGeom prst="straightConnector1">
-            <a:avLst/>
-          </a:prstGeom>
-          <a:ln w="38100">
-            <a:solidFill>
-              <a:srgbClr val="FA4098"/>
-            </a:solidFill>
-            <a:tailEnd type="triangle"/>
-          </a:ln>
-        </p:spPr>
-        <p:style>
-          <a:lnRef idx="1">
-            <a:schemeClr val="accent1"/>
-          </a:lnRef>
-          <a:fillRef idx="0">
-            <a:schemeClr val="accent1"/>
-          </a:fillRef>
-          <a:effectRef idx="0">
-            <a:schemeClr val="accent1"/>
-          </a:effectRef>
-          <a:fontRef idx="minor">
-            <a:schemeClr val="tx1"/>
-          </a:fontRef>
-        </p:style>
-      </p:cxnSp>
-      <p:cxnSp>
-        <p:nvCxnSpPr>
-          <p:cNvPr id="14" name="Connecteur droit avec flèche 13">
-            <a:extLst>
-              <a:ext uri="{FF2B5EF4-FFF2-40B4-BE49-F238E27FC236}">
-                <a16:creationId xmlns:a16="http://schemas.microsoft.com/office/drawing/2014/main" id="{69551437-B7E0-4B14-81BF-089517180515}"/>
-              </a:ext>
-            </a:extLst>
-          </p:cNvPr>
-          <p:cNvCxnSpPr>
-            <a:cxnSpLocks/>
-          </p:cNvCxnSpPr>
-          <p:nvPr/>
-        </p:nvCxnSpPr>
-        <p:spPr>
-          <a:xfrm flipH="1" flipV="1">
-            <a:off x="8970474" y="2761458"/>
-            <a:ext cx="260394" cy="308022"/>
-          </a:xfrm>
-          <a:prstGeom prst="straightConnector1">
-            <a:avLst/>
-          </a:prstGeom>
-          <a:ln w="38100">
-            <a:solidFill>
-              <a:srgbClr val="FA4098"/>
-            </a:solidFill>
-            <a:tailEnd type="triangle"/>
-          </a:ln>
-        </p:spPr>
-        <p:style>
-          <a:lnRef idx="1">
-            <a:schemeClr val="accent1"/>
-          </a:lnRef>
-          <a:fillRef idx="0">
-            <a:schemeClr val="accent1"/>
-          </a:fillRef>
-          <a:effectRef idx="0">
-            <a:schemeClr val="accent1"/>
-          </a:effectRef>
-          <a:fontRef idx="minor">
-            <a:schemeClr val="tx1"/>
-          </a:fontRef>
-        </p:style>
-      </p:cxnSp>
-      <p:cxnSp>
-        <p:nvCxnSpPr>
-          <p:cNvPr id="13" name="Connecteur droit avec flèche 12">
-            <a:extLst>
-              <a:ext uri="{FF2B5EF4-FFF2-40B4-BE49-F238E27FC236}">
-                <a16:creationId xmlns:a16="http://schemas.microsoft.com/office/drawing/2014/main" id="{5F97669A-15DA-42FE-BC27-B8F6665ADB75}"/>
-              </a:ext>
-            </a:extLst>
-          </p:cNvPr>
-          <p:cNvCxnSpPr>
-            <a:cxnSpLocks/>
-          </p:cNvCxnSpPr>
-          <p:nvPr/>
-        </p:nvCxnSpPr>
-        <p:spPr>
-          <a:xfrm flipV="1">
-            <a:off x="9407652" y="2775210"/>
-            <a:ext cx="626364" cy="288174"/>
-          </a:xfrm>
-          <a:prstGeom prst="straightConnector1">
-            <a:avLst/>
-          </a:prstGeom>
-          <a:ln w="38100">
-            <a:solidFill>
-              <a:srgbClr val="FA4098"/>
-            </a:solidFill>
-            <a:tailEnd type="triangle"/>
-          </a:ln>
-        </p:spPr>
-        <p:style>
-          <a:lnRef idx="1">
-            <a:schemeClr val="accent1"/>
-          </a:lnRef>
-          <a:fillRef idx="0">
-            <a:schemeClr val="accent1"/>
-          </a:fillRef>
-          <a:effectRef idx="0">
-            <a:schemeClr val="accent1"/>
-          </a:effectRef>
-          <a:fontRef idx="minor">
-            <a:schemeClr val="tx1"/>
-          </a:fontRef>
-        </p:style>
-      </p:cxnSp>
-      <p:sp>
-        <p:nvSpPr>
-          <p:cNvPr id="15" name="ZoneTexte 14">
-            <a:extLst>
-              <a:ext uri="{FF2B5EF4-FFF2-40B4-BE49-F238E27FC236}">
-                <a16:creationId xmlns:a16="http://schemas.microsoft.com/office/drawing/2014/main" id="{5966E6FE-27B4-4E27-AFA3-8AEEB5B8BFB4}"/>
-              </a:ext>
-            </a:extLst>
-          </p:cNvPr>
-          <p:cNvSpPr txBox="1"/>
-          <p:nvPr/>
-        </p:nvSpPr>
-        <p:spPr>
-          <a:xfrm>
-            <a:off x="4181856" y="5522762"/>
-            <a:ext cx="4128516" cy="369332"/>
-          </a:xfrm>
-          <a:prstGeom prst="rect">
-            <a:avLst/>
-          </a:prstGeom>
-          <a:noFill/>
-        </p:spPr>
-        <p:txBody>
-          <a:bodyPr wrap="square">
-            <a:spAutoFit/>
-          </a:bodyPr>
-          <a:lstStyle/>
-          <a:p>
-            <a:r>
-              <a:rPr lang="fr-CA" sz="1800" b="1">
-                <a:solidFill>
-                  <a:schemeClr val="tx1"/>
-                </a:solidFill>
-                <a:latin typeface="Courier New" panose="02070309020205020404" pitchFamily="49" charset="0"/>
-                <a:cs typeface="Courier New" panose="02070309020205020404" pitchFamily="49" charset="0"/>
-              </a:rPr>
-              <a:t>["Bleu",   "Rouge", "Jaune"]</a:t>
-            </a:r>
-            <a:endParaRPr lang="fr-CA"/>
-          </a:p>
-        </p:txBody>
-      </p:sp>
-      <p:sp>
-        <p:nvSpPr>
-          <p:cNvPr id="16" name="ZoneTexte 15">
-            <a:extLst>
-              <a:ext uri="{FF2B5EF4-FFF2-40B4-BE49-F238E27FC236}">
-                <a16:creationId xmlns:a16="http://schemas.microsoft.com/office/drawing/2014/main" id="{903A1AD6-AEBE-447E-A24D-BB098A0102F2}"/>
-              </a:ext>
-            </a:extLst>
-          </p:cNvPr>
-          <p:cNvSpPr txBox="1"/>
-          <p:nvPr/>
-        </p:nvSpPr>
-        <p:spPr>
-          <a:xfrm>
-            <a:off x="3487901" y="6176965"/>
-            <a:ext cx="2523744" cy="338554"/>
-          </a:xfrm>
-          <a:prstGeom prst="rect">
-            <a:avLst/>
-          </a:prstGeom>
-          <a:noFill/>
-        </p:spPr>
-        <p:txBody>
-          <a:bodyPr wrap="square">
-            <a:spAutoFit/>
-          </a:bodyPr>
-          <a:lstStyle/>
-          <a:p>
-            <a:r>
-              <a:rPr lang="fr-CA" sz="1600" b="1">
-                <a:latin typeface="Courier New" panose="02070309020205020404" pitchFamily="49" charset="0"/>
-                <a:cs typeface="Courier New" panose="02070309020205020404" pitchFamily="49" charset="0"/>
-              </a:rPr>
-              <a:t>"Rose", "Turquoise"</a:t>
-            </a:r>
-            <a:endParaRPr lang="fr-CA" sz="1600"/>
-          </a:p>
-        </p:txBody>
-      </p:sp>
-      <p:cxnSp>
-        <p:nvCxnSpPr>
-          <p:cNvPr id="17" name="Connecteur : en arc 16">
-            <a:extLst>
-              <a:ext uri="{FF2B5EF4-FFF2-40B4-BE49-F238E27FC236}">
-                <a16:creationId xmlns:a16="http://schemas.microsoft.com/office/drawing/2014/main" id="{CF66542F-6BA9-4BFC-BB61-90847C8EC416}"/>
-              </a:ext>
-            </a:extLst>
-          </p:cNvPr>
-          <p:cNvCxnSpPr>
-            <a:cxnSpLocks/>
-          </p:cNvCxnSpPr>
-          <p:nvPr/>
-        </p:nvCxnSpPr>
-        <p:spPr>
-          <a:xfrm rot="5400000" flipH="1" flipV="1">
-            <a:off x="4871471" y="5489419"/>
-            <a:ext cx="381168" cy="996972"/>
-          </a:xfrm>
-          <a:prstGeom prst="curvedConnector3">
-            <a:avLst>
-              <a:gd name="adj1" fmla="val 50000"/>
-            </a:avLst>
-          </a:prstGeom>
-          <a:ln w="57150">
-            <a:solidFill>
-              <a:srgbClr val="FA4098"/>
-            </a:solidFill>
-            <a:tailEnd type="triangle"/>
-          </a:ln>
-        </p:spPr>
-        <p:style>
-          <a:lnRef idx="1">
-            <a:schemeClr val="accent1"/>
-          </a:lnRef>
-          <a:fillRef idx="0">
-            <a:schemeClr val="accent1"/>
-          </a:fillRef>
-          <a:effectRef idx="0">
-            <a:schemeClr val="accent1"/>
-          </a:effectRef>
-          <a:fontRef idx="minor">
-            <a:schemeClr val="tx1"/>
-          </a:fontRef>
-        </p:style>
-      </p:cxnSp>
-    </p:spTree>
-    <p:extLst>
-      <p:ext uri="{BB962C8B-B14F-4D97-AF65-F5344CB8AC3E}">
-        <p14:creationId xmlns:p14="http://schemas.microsoft.com/office/powerpoint/2010/main" val="1821634896"/>
-      </p:ext>
-    </p:extLst>
-  </p:cSld>
-  <p:clrMapOvr>
-    <a:masterClrMapping/>
-  </p:clrMapOvr>
-</p:sld>
-</file>
-
-<file path=ppt/slides/slide17.xml><?xml version="1.0" encoding="utf-8"?>
-<p:sld xmlns:a="http://schemas.openxmlformats.org/drawingml/2006/main" xmlns:r="http://schemas.openxmlformats.org/officeDocument/2006/relationships" xmlns:p="http://schemas.openxmlformats.org/presentationml/2006/main">
-  <p:cSld>
-    <p:spTree>
-      <p:nvGrpSpPr>
-        <p:cNvPr id="1" name=""/>
-        <p:cNvGrpSpPr/>
-        <p:nvPr/>
-      </p:nvGrpSpPr>
-      <p:grpSpPr>
-        <a:xfrm>
-          <a:off x="0" y="0"/>
-          <a:ext cx="0" cy="0"/>
-          <a:chOff x="0" y="0"/>
-          <a:chExt cx="0" cy="0"/>
-        </a:xfrm>
-      </p:grpSpPr>
-      <p:sp>
-        <p:nvSpPr>
-          <p:cNvPr id="2" name="Espace réservé du contenu 1">
-            <a:extLst>
-              <a:ext uri="{FF2B5EF4-FFF2-40B4-BE49-F238E27FC236}">
-                <a16:creationId xmlns:a16="http://schemas.microsoft.com/office/drawing/2014/main" id="{48AD38C4-312E-4E09-9859-DEBFDBE180A2}"/>
-              </a:ext>
-            </a:extLst>
-          </p:cNvPr>
-          <p:cNvSpPr>
-            <a:spLocks noGrp="1"/>
-          </p:cNvSpPr>
-          <p:nvPr>
-            <p:ph idx="1"/>
-          </p:nvPr>
-        </p:nvSpPr>
-        <p:spPr/>
-        <p:txBody>
-          <a:bodyPr/>
-          <a:lstStyle/>
-          <a:p>
-            <a:r>
-              <a:rPr lang="fr-CA" dirty="0"/>
-              <a:t> </a:t>
-            </a:r>
-            <a:r>
-              <a:rPr lang="fr-CA" dirty="0">
-                <a:solidFill>
-                  <a:srgbClr val="FA4098"/>
-                </a:solidFill>
-              </a:rPr>
-              <a:t>splice()</a:t>
-            </a:r>
-          </a:p>
-          <a:p>
-            <a:pPr lvl="1"/>
-            <a:r>
-              <a:rPr lang="fr-CA" dirty="0"/>
-              <a:t> </a:t>
-            </a:r>
-            <a:r>
-              <a:rPr lang="fr-CA" b="1" dirty="0"/>
-              <a:t>Ajouter</a:t>
-            </a:r>
-            <a:r>
-              <a:rPr lang="fr-CA" dirty="0"/>
-              <a:t> des éléments</a:t>
-            </a:r>
-          </a:p>
-          <a:p>
-            <a:pPr lvl="1"/>
-            <a:r>
-              <a:rPr lang="fr-CA" dirty="0"/>
-              <a:t> Autre Exemple :</a:t>
-            </a:r>
-          </a:p>
-          <a:p>
-            <a:pPr marL="914400" lvl="2" indent="0">
-              <a:buNone/>
-            </a:pPr>
-            <a:r>
-              <a:rPr lang="fr-CA" sz="1600" b="1" dirty="0">
-                <a:solidFill>
-                  <a:schemeClr val="tx1"/>
-                </a:solidFill>
-                <a:latin typeface="Courier New" panose="02070309020205020404" pitchFamily="49" charset="0"/>
-                <a:cs typeface="Courier New" panose="02070309020205020404" pitchFamily="49" charset="0"/>
-              </a:rPr>
-              <a:t>let </a:t>
-            </a:r>
-            <a:r>
-              <a:rPr lang="fr-CA" sz="1600" b="1" dirty="0">
-                <a:solidFill>
-                  <a:schemeClr val="accent6"/>
-                </a:solidFill>
-                <a:latin typeface="Courier New" panose="02070309020205020404" pitchFamily="49" charset="0"/>
-                <a:cs typeface="Courier New" panose="02070309020205020404" pitchFamily="49" charset="0"/>
-              </a:rPr>
-              <a:t>couleurs</a:t>
-            </a:r>
-            <a:r>
-              <a:rPr lang="fr-CA" sz="1600" b="1" dirty="0">
-                <a:solidFill>
-                  <a:schemeClr val="tx1"/>
-                </a:solidFill>
-                <a:latin typeface="Courier New" panose="02070309020205020404" pitchFamily="49" charset="0"/>
-                <a:cs typeface="Courier New" panose="02070309020205020404" pitchFamily="49" charset="0"/>
-              </a:rPr>
-              <a:t> = ["Bleu", "Rouge", "Jaune"];</a:t>
-            </a:r>
-          </a:p>
-          <a:p>
-            <a:pPr marL="914400" lvl="2" indent="0">
-              <a:buNone/>
-            </a:pPr>
-            <a:r>
-              <a:rPr lang="fr-CA" sz="1600" b="1" dirty="0">
-                <a:solidFill>
-                  <a:schemeClr val="accent6"/>
-                </a:solidFill>
-                <a:latin typeface="Courier New" panose="02070309020205020404" pitchFamily="49" charset="0"/>
-                <a:cs typeface="Courier New" panose="02070309020205020404" pitchFamily="49" charset="0"/>
-              </a:rPr>
-              <a:t>couleurs</a:t>
-            </a:r>
-            <a:r>
-              <a:rPr lang="fr-CA" sz="1600" b="1" dirty="0">
-                <a:solidFill>
-                  <a:schemeClr val="tx1"/>
-                </a:solidFill>
-                <a:latin typeface="Courier New" panose="02070309020205020404" pitchFamily="49" charset="0"/>
-                <a:cs typeface="Courier New" panose="02070309020205020404" pitchFamily="49" charset="0"/>
-              </a:rPr>
-              <a:t>.</a:t>
-            </a:r>
-            <a:r>
-              <a:rPr lang="fr-CA" sz="1600" b="1" dirty="0">
-                <a:solidFill>
-                  <a:srgbClr val="C00000"/>
-                </a:solidFill>
-                <a:latin typeface="Courier New" panose="02070309020205020404" pitchFamily="49" charset="0"/>
-                <a:cs typeface="Courier New" panose="02070309020205020404" pitchFamily="49" charset="0"/>
-              </a:rPr>
-              <a:t>splice</a:t>
-            </a:r>
-            <a:r>
-              <a:rPr lang="fr-CA" sz="1600" b="1" dirty="0">
-                <a:solidFill>
-                  <a:schemeClr val="tx1"/>
-                </a:solidFill>
-                <a:latin typeface="Courier New" panose="02070309020205020404" pitchFamily="49" charset="0"/>
-                <a:cs typeface="Courier New" panose="02070309020205020404" pitchFamily="49" charset="0"/>
-              </a:rPr>
-              <a:t>(0, 0, "Magenta");</a:t>
-            </a:r>
-          </a:p>
-          <a:p>
-            <a:pPr marL="914400" lvl="2" indent="0">
-              <a:buNone/>
-            </a:pPr>
-            <a:r>
-              <a:rPr lang="fr-CA" sz="1600" b="1" dirty="0">
-                <a:solidFill>
-                  <a:schemeClr val="bg1">
-                    <a:lumMod val="50000"/>
-                  </a:schemeClr>
-                </a:solidFill>
-                <a:latin typeface="Courier New" panose="02070309020205020404" pitchFamily="49" charset="0"/>
-                <a:cs typeface="Courier New" panose="02070309020205020404" pitchFamily="49" charset="0"/>
-              </a:rPr>
-              <a:t>// couleurs vaut maintenant ["Magenta", "Bleu", "Rouge", "Jaune"]</a:t>
-            </a:r>
-          </a:p>
-          <a:p>
-            <a:pPr marL="914400" lvl="2" indent="0">
-              <a:buNone/>
-            </a:pPr>
-            <a:endParaRPr lang="fr-CA" sz="1600" b="1" dirty="0">
-              <a:solidFill>
-                <a:schemeClr val="bg1">
-                  <a:lumMod val="50000"/>
-                </a:schemeClr>
-              </a:solidFill>
-              <a:latin typeface="Courier New" panose="02070309020205020404" pitchFamily="49" charset="0"/>
-              <a:cs typeface="Courier New" panose="02070309020205020404" pitchFamily="49" charset="0"/>
-            </a:endParaRPr>
-          </a:p>
-          <a:p>
-            <a:pPr lvl="1"/>
-            <a:r>
-              <a:rPr lang="fr-CA" sz="2000" dirty="0">
-                <a:cs typeface="Courier New" panose="02070309020205020404" pitchFamily="49" charset="0"/>
-              </a:rPr>
-              <a:t> </a:t>
-            </a:r>
-            <a:r>
-              <a:rPr lang="fr-CA" sz="2000" b="1" dirty="0">
-                <a:solidFill>
-                  <a:schemeClr val="accent6"/>
-                </a:solidFill>
-                <a:latin typeface="Courier New" panose="02070309020205020404" pitchFamily="49" charset="0"/>
-                <a:cs typeface="Courier New" panose="02070309020205020404" pitchFamily="49" charset="0"/>
-              </a:rPr>
-              <a:t>"Bleu"</a:t>
-            </a:r>
-            <a:r>
-              <a:rPr lang="fr-CA" sz="2000" dirty="0">
-                <a:cs typeface="Courier New" panose="02070309020205020404" pitchFamily="49" charset="0"/>
-              </a:rPr>
-              <a:t> était l’élément à l’</a:t>
-            </a:r>
-            <a:r>
-              <a:rPr lang="fr-CA" sz="2000" dirty="0">
-                <a:solidFill>
-                  <a:srgbClr val="FA4098"/>
-                </a:solidFill>
-                <a:cs typeface="Courier New" panose="02070309020205020404" pitchFamily="49" charset="0"/>
-              </a:rPr>
-              <a:t>index 0</a:t>
-            </a:r>
-            <a:r>
-              <a:rPr lang="fr-CA" sz="2000" dirty="0">
-                <a:cs typeface="Courier New" panose="02070309020205020404" pitchFamily="49" charset="0"/>
-              </a:rPr>
-              <a:t> et on a donc ajouté l’élément </a:t>
-            </a:r>
-            <a:r>
-              <a:rPr lang="fr-CA" sz="2000" b="1" dirty="0">
-                <a:solidFill>
-                  <a:schemeClr val="tx1"/>
-                </a:solidFill>
-                <a:latin typeface="Courier New" panose="02070309020205020404" pitchFamily="49" charset="0"/>
-                <a:cs typeface="Courier New" panose="02070309020205020404" pitchFamily="49" charset="0"/>
-              </a:rPr>
-              <a:t>"Magenta"</a:t>
-            </a:r>
-            <a:r>
-              <a:rPr lang="fr-CA" sz="2000" dirty="0">
-                <a:cs typeface="Courier New" panose="02070309020205020404" pitchFamily="49" charset="0"/>
-              </a:rPr>
-              <a:t> juste avant.</a:t>
-            </a:r>
-            <a:endParaRPr lang="fr-CA" dirty="0"/>
-          </a:p>
-        </p:txBody>
-      </p:sp>
-      <p:sp>
-        <p:nvSpPr>
-          <p:cNvPr id="3" name="Titre 2">
-            <a:extLst>
-              <a:ext uri="{FF2B5EF4-FFF2-40B4-BE49-F238E27FC236}">
-                <a16:creationId xmlns:a16="http://schemas.microsoft.com/office/drawing/2014/main" id="{65F729F3-756E-4481-B6E0-C5186C398E40}"/>
-              </a:ext>
-            </a:extLst>
-          </p:cNvPr>
-          <p:cNvSpPr>
-            <a:spLocks noGrp="1"/>
-          </p:cNvSpPr>
-          <p:nvPr>
-            <p:ph type="title"/>
-          </p:nvPr>
-        </p:nvSpPr>
-        <p:spPr/>
-        <p:txBody>
-          <a:bodyPr/>
-          <a:lstStyle/>
-          <a:p>
-            <a:r>
-              <a:rPr lang="fr-CA" dirty="0"/>
-              <a:t>Splice</a:t>
-            </a:r>
-          </a:p>
-        </p:txBody>
-      </p:sp>
-      <p:sp>
-        <p:nvSpPr>
-          <p:cNvPr id="5" name="ZoneTexte 4">
-            <a:extLst>
-              <a:ext uri="{FF2B5EF4-FFF2-40B4-BE49-F238E27FC236}">
-                <a16:creationId xmlns:a16="http://schemas.microsoft.com/office/drawing/2014/main" id="{81F4CF8A-9C03-4C65-8F86-913FCB908487}"/>
-              </a:ext>
-            </a:extLst>
-          </p:cNvPr>
-          <p:cNvSpPr txBox="1"/>
-          <p:nvPr/>
-        </p:nvSpPr>
-        <p:spPr>
-          <a:xfrm>
-            <a:off x="5155692" y="5069892"/>
-            <a:ext cx="4360164" cy="369332"/>
-          </a:xfrm>
-          <a:prstGeom prst="rect">
-            <a:avLst/>
-          </a:prstGeom>
-          <a:noFill/>
-        </p:spPr>
-        <p:txBody>
-          <a:bodyPr wrap="square">
-            <a:spAutoFit/>
-          </a:bodyPr>
-          <a:lstStyle/>
-          <a:p>
-            <a:r>
-              <a:rPr lang="fr-CA" b="1">
-                <a:solidFill>
-                  <a:schemeClr val="tx1"/>
-                </a:solidFill>
-                <a:latin typeface="Courier New" panose="02070309020205020404" pitchFamily="49" charset="0"/>
-                <a:cs typeface="Courier New" panose="02070309020205020404" pitchFamily="49" charset="0"/>
-              </a:rPr>
-              <a:t>[  "Bleu", "Rouge", "Jaune"]</a:t>
-            </a:r>
-            <a:endParaRPr lang="fr-CA" b="1" dirty="0">
-              <a:solidFill>
-                <a:schemeClr val="tx1"/>
-              </a:solidFill>
-              <a:latin typeface="Courier New" panose="02070309020205020404" pitchFamily="49" charset="0"/>
-              <a:cs typeface="Courier New" panose="02070309020205020404" pitchFamily="49" charset="0"/>
-            </a:endParaRPr>
-          </a:p>
-        </p:txBody>
-      </p:sp>
-      <p:sp>
-        <p:nvSpPr>
-          <p:cNvPr id="7" name="ZoneTexte 6">
-            <a:extLst>
-              <a:ext uri="{FF2B5EF4-FFF2-40B4-BE49-F238E27FC236}">
-                <a16:creationId xmlns:a16="http://schemas.microsoft.com/office/drawing/2014/main" id="{1CD0FFC6-8470-464C-BDFF-8DEB7B6A8087}"/>
-              </a:ext>
-            </a:extLst>
-          </p:cNvPr>
-          <p:cNvSpPr txBox="1"/>
-          <p:nvPr/>
-        </p:nvSpPr>
-        <p:spPr>
-          <a:xfrm>
-            <a:off x="3853612" y="5707428"/>
-            <a:ext cx="1446276" cy="369332"/>
-          </a:xfrm>
-          <a:prstGeom prst="rect">
-            <a:avLst/>
-          </a:prstGeom>
-          <a:noFill/>
-        </p:spPr>
-        <p:txBody>
-          <a:bodyPr wrap="square">
-            <a:spAutoFit/>
-          </a:bodyPr>
-          <a:lstStyle/>
-          <a:p>
-            <a:r>
-              <a:rPr lang="fr-CA" sz="1800" b="1">
-                <a:solidFill>
-                  <a:schemeClr val="tx1"/>
-                </a:solidFill>
-                <a:latin typeface="Courier New" panose="02070309020205020404" pitchFamily="49" charset="0"/>
-                <a:cs typeface="Courier New" panose="02070309020205020404" pitchFamily="49" charset="0"/>
-              </a:rPr>
-              <a:t>"Magenta"</a:t>
-            </a:r>
-            <a:endParaRPr lang="fr-CA"/>
-          </a:p>
-        </p:txBody>
-      </p:sp>
-      <p:cxnSp>
-        <p:nvCxnSpPr>
-          <p:cNvPr id="8" name="Connecteur : en arc 7">
-            <a:extLst>
-              <a:ext uri="{FF2B5EF4-FFF2-40B4-BE49-F238E27FC236}">
-                <a16:creationId xmlns:a16="http://schemas.microsoft.com/office/drawing/2014/main" id="{75FB08C4-BBF2-4E58-834B-8497E0253214}"/>
-              </a:ext>
-            </a:extLst>
-          </p:cNvPr>
-          <p:cNvCxnSpPr>
-            <a:cxnSpLocks/>
-          </p:cNvCxnSpPr>
-          <p:nvPr/>
-        </p:nvCxnSpPr>
-        <p:spPr>
-          <a:xfrm rot="5400000" flipH="1" flipV="1">
-            <a:off x="4884652" y="5074840"/>
-            <a:ext cx="381168" cy="996972"/>
-          </a:xfrm>
-          <a:prstGeom prst="curvedConnector3">
-            <a:avLst>
-              <a:gd name="adj1" fmla="val 50000"/>
-            </a:avLst>
-          </a:prstGeom>
-          <a:ln w="57150">
-            <a:solidFill>
-              <a:srgbClr val="FA4098"/>
-            </a:solidFill>
-            <a:tailEnd type="triangle"/>
-          </a:ln>
-        </p:spPr>
-        <p:style>
-          <a:lnRef idx="1">
-            <a:schemeClr val="accent1"/>
-          </a:lnRef>
-          <a:fillRef idx="0">
-            <a:schemeClr val="accent1"/>
-          </a:fillRef>
-          <a:effectRef idx="0">
-            <a:schemeClr val="accent1"/>
-          </a:effectRef>
-          <a:fontRef idx="minor">
-            <a:schemeClr val="tx1"/>
-          </a:fontRef>
-        </p:style>
-      </p:cxnSp>
-    </p:spTree>
-    <p:extLst>
-      <p:ext uri="{BB962C8B-B14F-4D97-AF65-F5344CB8AC3E}">
-        <p14:creationId xmlns:p14="http://schemas.microsoft.com/office/powerpoint/2010/main" val="179243691"/>
-      </p:ext>
-    </p:extLst>
-  </p:cSld>
-  <p:clrMapOvr>
-    <a:masterClrMapping/>
-  </p:clrMapOvr>
-</p:sld>
-</file>
-
-<file path=ppt/slides/slide18.xml><?xml version="1.0" encoding="utf-8"?>
-<p:sld xmlns:a="http://schemas.openxmlformats.org/drawingml/2006/main" xmlns:r="http://schemas.openxmlformats.org/officeDocument/2006/relationships" xmlns:p="http://schemas.openxmlformats.org/presentationml/2006/main">
-  <p:cSld>
-    <p:spTree>
-      <p:nvGrpSpPr>
-        <p:cNvPr id="1" name=""/>
-        <p:cNvGrpSpPr/>
-        <p:nvPr/>
-      </p:nvGrpSpPr>
-      <p:grpSpPr>
-        <a:xfrm>
-          <a:off x="0" y="0"/>
-          <a:ext cx="0" cy="0"/>
-          <a:chOff x="0" y="0"/>
-          <a:chExt cx="0" cy="0"/>
-        </a:xfrm>
-      </p:grpSpPr>
-      <p:sp>
-        <p:nvSpPr>
-          <p:cNvPr id="2" name="Espace réservé du contenu 1">
-            <a:extLst>
-              <a:ext uri="{FF2B5EF4-FFF2-40B4-BE49-F238E27FC236}">
-                <a16:creationId xmlns:a16="http://schemas.microsoft.com/office/drawing/2014/main" id="{48AD38C4-312E-4E09-9859-DEBFDBE180A2}"/>
-              </a:ext>
-            </a:extLst>
-          </p:cNvPr>
-          <p:cNvSpPr>
-            <a:spLocks noGrp="1"/>
-          </p:cNvSpPr>
-          <p:nvPr>
-            <p:ph idx="1"/>
-          </p:nvPr>
-        </p:nvSpPr>
-        <p:spPr/>
-        <p:txBody>
-          <a:bodyPr/>
-          <a:lstStyle/>
-          <a:p>
-            <a:r>
-              <a:rPr lang="fr-CA" dirty="0"/>
-              <a:t> </a:t>
-            </a:r>
-            <a:r>
-              <a:rPr lang="fr-CA" dirty="0">
-                <a:solidFill>
-                  <a:srgbClr val="FA4098"/>
-                </a:solidFill>
-              </a:rPr>
-              <a:t>splice()</a:t>
-            </a:r>
-          </a:p>
-          <a:p>
-            <a:pPr lvl="1"/>
-            <a:r>
-              <a:rPr lang="fr-CA" dirty="0"/>
-              <a:t> </a:t>
-            </a:r>
-            <a:r>
-              <a:rPr lang="fr-CA" b="1" dirty="0"/>
-              <a:t>Ajouter ET retirer</a:t>
-            </a:r>
-            <a:r>
-              <a:rPr lang="fr-CA" dirty="0"/>
-              <a:t> des éléments</a:t>
-            </a:r>
-          </a:p>
-          <a:p>
-            <a:pPr lvl="1"/>
-            <a:r>
-              <a:rPr lang="fr-CA" dirty="0"/>
-              <a:t> Syntaxe pour ajouter des éléments</a:t>
-            </a:r>
-          </a:p>
-          <a:p>
-            <a:pPr marL="0" indent="0" algn="ctr">
-              <a:buNone/>
-            </a:pPr>
-            <a:r>
-              <a:rPr lang="fr-CA" sz="2000" b="1">
-                <a:latin typeface="Courier New" panose="02070309020205020404" pitchFamily="49" charset="0"/>
-                <a:cs typeface="Courier New" panose="02070309020205020404" pitchFamily="49" charset="0"/>
-              </a:rPr>
-              <a:t>monTableau</a:t>
-            </a:r>
-            <a:r>
-              <a:rPr lang="fr-CA" sz="2000" b="1" dirty="0">
-                <a:latin typeface="Courier New" panose="02070309020205020404" pitchFamily="49" charset="0"/>
-                <a:cs typeface="Courier New" panose="02070309020205020404" pitchFamily="49" charset="0"/>
-              </a:rPr>
-              <a:t>.</a:t>
-            </a:r>
-            <a:r>
-              <a:rPr lang="fr-CA" sz="2000" b="1" dirty="0">
-                <a:solidFill>
-                  <a:srgbClr val="FA4098"/>
-                </a:solidFill>
-                <a:latin typeface="Courier New" panose="02070309020205020404" pitchFamily="49" charset="0"/>
-                <a:cs typeface="Courier New" panose="02070309020205020404" pitchFamily="49" charset="0"/>
-              </a:rPr>
-              <a:t>splice</a:t>
-            </a:r>
-            <a:r>
-              <a:rPr lang="fr-CA" sz="2000" b="1" dirty="0">
-                <a:latin typeface="Courier New" panose="02070309020205020404" pitchFamily="49" charset="0"/>
-                <a:cs typeface="Courier New" panose="02070309020205020404" pitchFamily="49" charset="0"/>
-              </a:rPr>
-              <a:t>(</a:t>
-            </a:r>
-            <a:r>
-              <a:rPr lang="fr-CA" sz="2000" b="1" dirty="0">
-                <a:solidFill>
-                  <a:srgbClr val="FA4098"/>
-                </a:solidFill>
-                <a:latin typeface="Courier New" panose="02070309020205020404" pitchFamily="49" charset="0"/>
-                <a:cs typeface="Courier New" panose="02070309020205020404" pitchFamily="49" charset="0"/>
-              </a:rPr>
-              <a:t>index</a:t>
-            </a:r>
-            <a:r>
-              <a:rPr lang="fr-CA" sz="2000" b="1" dirty="0">
-                <a:latin typeface="Courier New" panose="02070309020205020404" pitchFamily="49" charset="0"/>
-                <a:cs typeface="Courier New" panose="02070309020205020404" pitchFamily="49" charset="0"/>
-              </a:rPr>
-              <a:t>, </a:t>
-            </a:r>
-            <a:r>
-              <a:rPr lang="fr-CA" sz="2000" b="1" dirty="0">
-                <a:solidFill>
-                  <a:srgbClr val="FA4098"/>
-                </a:solidFill>
-                <a:latin typeface="Courier New" panose="02070309020205020404" pitchFamily="49" charset="0"/>
-                <a:cs typeface="Courier New" panose="02070309020205020404" pitchFamily="49" charset="0"/>
-              </a:rPr>
-              <a:t>nbRetirer</a:t>
-            </a:r>
-            <a:r>
-              <a:rPr lang="fr-CA" sz="2000" b="1" dirty="0">
-                <a:latin typeface="Courier New" panose="02070309020205020404" pitchFamily="49" charset="0"/>
-                <a:cs typeface="Courier New" panose="02070309020205020404" pitchFamily="49" charset="0"/>
-              </a:rPr>
-              <a:t>,</a:t>
-            </a:r>
-            <a:r>
-              <a:rPr lang="fr-CA" sz="2000" b="1" dirty="0">
-                <a:solidFill>
-                  <a:srgbClr val="FA4098"/>
-                </a:solidFill>
-                <a:latin typeface="Courier New" panose="02070309020205020404" pitchFamily="49" charset="0"/>
-                <a:cs typeface="Courier New" panose="02070309020205020404" pitchFamily="49" charset="0"/>
-              </a:rPr>
-              <a:t> valeur1</a:t>
-            </a:r>
-            <a:r>
-              <a:rPr lang="fr-CA" sz="2000" b="1" dirty="0">
-                <a:latin typeface="Courier New" panose="02070309020205020404" pitchFamily="49" charset="0"/>
-                <a:cs typeface="Courier New" panose="02070309020205020404" pitchFamily="49" charset="0"/>
-              </a:rPr>
-              <a:t>,</a:t>
-            </a:r>
-            <a:r>
-              <a:rPr lang="fr-CA" sz="2000" b="1" dirty="0">
-                <a:solidFill>
-                  <a:srgbClr val="FA4098"/>
-                </a:solidFill>
-                <a:latin typeface="Courier New" panose="02070309020205020404" pitchFamily="49" charset="0"/>
-                <a:cs typeface="Courier New" panose="02070309020205020404" pitchFamily="49" charset="0"/>
-              </a:rPr>
-              <a:t> valeur2</a:t>
-            </a:r>
-            <a:r>
-              <a:rPr lang="fr-CA" sz="2000" b="1" dirty="0">
-                <a:latin typeface="Courier New" panose="02070309020205020404" pitchFamily="49" charset="0"/>
-                <a:cs typeface="Courier New" panose="02070309020205020404" pitchFamily="49" charset="0"/>
-              </a:rPr>
-              <a:t>,</a:t>
-            </a:r>
-            <a:r>
-              <a:rPr lang="fr-CA" sz="2000" b="1" dirty="0">
-                <a:solidFill>
-                  <a:srgbClr val="FA4098"/>
-                </a:solidFill>
-                <a:latin typeface="Courier New" panose="02070309020205020404" pitchFamily="49" charset="0"/>
-                <a:cs typeface="Courier New" panose="02070309020205020404" pitchFamily="49" charset="0"/>
-              </a:rPr>
-              <a:t> ...</a:t>
-            </a:r>
-            <a:r>
-              <a:rPr lang="fr-CA" sz="2000" b="1" dirty="0">
-                <a:latin typeface="Courier New" panose="02070309020205020404" pitchFamily="49" charset="0"/>
-                <a:cs typeface="Courier New" panose="02070309020205020404" pitchFamily="49" charset="0"/>
-              </a:rPr>
-              <a:t>)</a:t>
-            </a:r>
-          </a:p>
-          <a:p>
-            <a:pPr marL="0" indent="0" algn="ctr">
-              <a:buNone/>
-            </a:pPr>
-            <a:endParaRPr lang="fr-CA" sz="2000" b="1" dirty="0">
-              <a:latin typeface="Courier New" panose="02070309020205020404" pitchFamily="49" charset="0"/>
-              <a:cs typeface="Courier New" panose="02070309020205020404" pitchFamily="49" charset="0"/>
-            </a:endParaRPr>
-          </a:p>
-          <a:p>
-            <a:pPr marL="0" indent="0" algn="ctr">
-              <a:buNone/>
-            </a:pPr>
-            <a:endParaRPr lang="fr-CA" sz="2000" b="1" dirty="0">
-              <a:latin typeface="Courier New" panose="02070309020205020404" pitchFamily="49" charset="0"/>
-              <a:cs typeface="Courier New" panose="02070309020205020404" pitchFamily="49" charset="0"/>
-            </a:endParaRPr>
-          </a:p>
-          <a:p>
-            <a:pPr lvl="1"/>
-            <a:r>
-              <a:rPr lang="fr-CA" dirty="0"/>
-              <a:t> Exemple :</a:t>
-            </a:r>
-          </a:p>
-          <a:p>
-            <a:pPr marL="914400" lvl="2" indent="0">
-              <a:buNone/>
-            </a:pPr>
-            <a:r>
-              <a:rPr lang="fr-CA" sz="1600" b="1" dirty="0">
-                <a:solidFill>
-                  <a:schemeClr val="tx1"/>
-                </a:solidFill>
-                <a:latin typeface="Courier New" panose="02070309020205020404" pitchFamily="49" charset="0"/>
-                <a:cs typeface="Courier New" panose="02070309020205020404" pitchFamily="49" charset="0"/>
-              </a:rPr>
-              <a:t>let </a:t>
-            </a:r>
-            <a:r>
-              <a:rPr lang="fr-CA" sz="1600" b="1" dirty="0">
-                <a:solidFill>
-                  <a:schemeClr val="accent6"/>
-                </a:solidFill>
-                <a:latin typeface="Courier New" panose="02070309020205020404" pitchFamily="49" charset="0"/>
-                <a:cs typeface="Courier New" panose="02070309020205020404" pitchFamily="49" charset="0"/>
-              </a:rPr>
-              <a:t>couleurs</a:t>
-            </a:r>
-            <a:r>
-              <a:rPr lang="fr-CA" sz="1600" b="1" dirty="0">
-                <a:solidFill>
-                  <a:schemeClr val="tx1"/>
-                </a:solidFill>
-                <a:latin typeface="Courier New" panose="02070309020205020404" pitchFamily="49" charset="0"/>
-                <a:cs typeface="Courier New" panose="02070309020205020404" pitchFamily="49" charset="0"/>
-              </a:rPr>
-              <a:t> = ["Bleu", "Rouge", "Jaune", "Vert"];</a:t>
-            </a:r>
-          </a:p>
-          <a:p>
-            <a:pPr marL="914400" lvl="2" indent="0">
-              <a:buNone/>
-            </a:pPr>
-            <a:r>
-              <a:rPr lang="fr-CA" sz="1600" b="1" dirty="0">
-                <a:solidFill>
-                  <a:schemeClr val="accent6"/>
-                </a:solidFill>
-                <a:latin typeface="Courier New" panose="02070309020205020404" pitchFamily="49" charset="0"/>
-                <a:cs typeface="Courier New" panose="02070309020205020404" pitchFamily="49" charset="0"/>
-              </a:rPr>
-              <a:t>couleurs</a:t>
-            </a:r>
-            <a:r>
-              <a:rPr lang="fr-CA" sz="1600" b="1" dirty="0">
-                <a:solidFill>
-                  <a:schemeClr val="tx1"/>
-                </a:solidFill>
-                <a:latin typeface="Courier New" panose="02070309020205020404" pitchFamily="49" charset="0"/>
-                <a:cs typeface="Courier New" panose="02070309020205020404" pitchFamily="49" charset="0"/>
-              </a:rPr>
-              <a:t>.</a:t>
-            </a:r>
-            <a:r>
-              <a:rPr lang="fr-CA" sz="1600" b="1" dirty="0">
-                <a:solidFill>
-                  <a:srgbClr val="C00000"/>
-                </a:solidFill>
-                <a:latin typeface="Courier New" panose="02070309020205020404" pitchFamily="49" charset="0"/>
-                <a:cs typeface="Courier New" panose="02070309020205020404" pitchFamily="49" charset="0"/>
-              </a:rPr>
-              <a:t>splice</a:t>
-            </a:r>
-            <a:r>
-              <a:rPr lang="fr-CA" sz="1600" b="1" dirty="0">
-                <a:solidFill>
-                  <a:schemeClr val="tx1"/>
-                </a:solidFill>
-                <a:latin typeface="Courier New" panose="02070309020205020404" pitchFamily="49" charset="0"/>
-                <a:cs typeface="Courier New" panose="02070309020205020404" pitchFamily="49" charset="0"/>
-              </a:rPr>
-              <a:t>(</a:t>
-            </a:r>
-            <a:r>
-              <a:rPr lang="fr-CA" sz="1600" b="1" dirty="0">
-                <a:solidFill>
-                  <a:srgbClr val="FA4098"/>
-                </a:solidFill>
-                <a:latin typeface="Courier New" panose="02070309020205020404" pitchFamily="49" charset="0"/>
-                <a:cs typeface="Courier New" panose="02070309020205020404" pitchFamily="49" charset="0"/>
-              </a:rPr>
-              <a:t>1</a:t>
-            </a:r>
-            <a:r>
-              <a:rPr lang="fr-CA" sz="1600" b="1" dirty="0">
-                <a:solidFill>
-                  <a:schemeClr val="tx1"/>
-                </a:solidFill>
-                <a:latin typeface="Courier New" panose="02070309020205020404" pitchFamily="49" charset="0"/>
-                <a:cs typeface="Courier New" panose="02070309020205020404" pitchFamily="49" charset="0"/>
-              </a:rPr>
-              <a:t>, </a:t>
-            </a:r>
-            <a:r>
-              <a:rPr lang="fr-CA" sz="1600" b="1" dirty="0">
-                <a:solidFill>
-                  <a:srgbClr val="FA4098"/>
-                </a:solidFill>
-                <a:latin typeface="Courier New" panose="02070309020205020404" pitchFamily="49" charset="0"/>
-                <a:cs typeface="Courier New" panose="02070309020205020404" pitchFamily="49" charset="0"/>
-              </a:rPr>
-              <a:t>2</a:t>
-            </a:r>
-            <a:r>
-              <a:rPr lang="fr-CA" sz="1600" b="1" dirty="0">
-                <a:solidFill>
-                  <a:schemeClr val="tx1"/>
-                </a:solidFill>
-                <a:latin typeface="Courier New" panose="02070309020205020404" pitchFamily="49" charset="0"/>
-                <a:cs typeface="Courier New" panose="02070309020205020404" pitchFamily="49" charset="0"/>
-              </a:rPr>
-              <a:t>,</a:t>
-            </a:r>
-            <a:r>
-              <a:rPr lang="fr-CA" sz="1600" b="1" dirty="0">
-                <a:solidFill>
-                  <a:srgbClr val="FA4098"/>
-                </a:solidFill>
-                <a:latin typeface="Courier New" panose="02070309020205020404" pitchFamily="49" charset="0"/>
-                <a:cs typeface="Courier New" panose="02070309020205020404" pitchFamily="49" charset="0"/>
-              </a:rPr>
-              <a:t> "Beige"</a:t>
-            </a:r>
-            <a:r>
-              <a:rPr lang="fr-CA" sz="1600" b="1" dirty="0">
-                <a:solidFill>
-                  <a:schemeClr val="tx1"/>
-                </a:solidFill>
-                <a:latin typeface="Courier New" panose="02070309020205020404" pitchFamily="49" charset="0"/>
-                <a:cs typeface="Courier New" panose="02070309020205020404" pitchFamily="49" charset="0"/>
-              </a:rPr>
-              <a:t>,</a:t>
-            </a:r>
-            <a:r>
-              <a:rPr lang="fr-CA" sz="1600" b="1" dirty="0">
-                <a:solidFill>
-                  <a:srgbClr val="FA4098"/>
-                </a:solidFill>
-                <a:latin typeface="Courier New" panose="02070309020205020404" pitchFamily="49" charset="0"/>
-                <a:cs typeface="Courier New" panose="02070309020205020404" pitchFamily="49" charset="0"/>
-              </a:rPr>
-              <a:t> "Lilas"</a:t>
-            </a:r>
-            <a:r>
-              <a:rPr lang="fr-CA" sz="1600" b="1" dirty="0">
-                <a:solidFill>
-                  <a:schemeClr val="tx1"/>
-                </a:solidFill>
-                <a:latin typeface="Courier New" panose="02070309020205020404" pitchFamily="49" charset="0"/>
-                <a:cs typeface="Courier New" panose="02070309020205020404" pitchFamily="49" charset="0"/>
-              </a:rPr>
-              <a:t>);</a:t>
-            </a:r>
-          </a:p>
-          <a:p>
-            <a:pPr marL="914400" lvl="2" indent="0">
-              <a:buNone/>
-            </a:pPr>
-            <a:r>
-              <a:rPr lang="fr-CA" sz="1600" b="1" dirty="0">
-                <a:solidFill>
-                  <a:schemeClr val="bg1">
-                    <a:lumMod val="50000"/>
-                  </a:schemeClr>
-                </a:solidFill>
-                <a:latin typeface="Courier New" panose="02070309020205020404" pitchFamily="49" charset="0"/>
-                <a:cs typeface="Courier New" panose="02070309020205020404" pitchFamily="49" charset="0"/>
-              </a:rPr>
-              <a:t>// couleurs vaut maintenant ["Bleu", "Beige", "Lilas", "Vert"]</a:t>
-            </a:r>
-          </a:p>
-          <a:p>
-            <a:pPr marL="914400" lvl="2" indent="0">
-              <a:buNone/>
-            </a:pPr>
-            <a:endParaRPr lang="fr-CA" dirty="0"/>
-          </a:p>
-          <a:p>
-            <a:pPr lvl="1"/>
-            <a:endParaRPr lang="fr-CA" dirty="0"/>
-          </a:p>
-          <a:p>
-            <a:pPr lvl="1"/>
-            <a:endParaRPr lang="fr-CA" dirty="0"/>
-          </a:p>
-          <a:p>
-            <a:endParaRPr lang="fr-CA" dirty="0"/>
-          </a:p>
-        </p:txBody>
-      </p:sp>
-      <p:sp>
-        <p:nvSpPr>
-          <p:cNvPr id="3" name="Titre 2">
-            <a:extLst>
-              <a:ext uri="{FF2B5EF4-FFF2-40B4-BE49-F238E27FC236}">
-                <a16:creationId xmlns:a16="http://schemas.microsoft.com/office/drawing/2014/main" id="{65F729F3-756E-4481-B6E0-C5186C398E40}"/>
-              </a:ext>
-            </a:extLst>
-          </p:cNvPr>
-          <p:cNvSpPr>
-            <a:spLocks noGrp="1"/>
-          </p:cNvSpPr>
-          <p:nvPr>
-            <p:ph type="title"/>
-          </p:nvPr>
-        </p:nvSpPr>
-        <p:spPr/>
-        <p:txBody>
-          <a:bodyPr/>
-          <a:lstStyle/>
-          <a:p>
-            <a:r>
-              <a:rPr lang="fr-CA" dirty="0"/>
-              <a:t>Splice</a:t>
-            </a:r>
-          </a:p>
-        </p:txBody>
-      </p:sp>
-      <p:sp>
-        <p:nvSpPr>
-          <p:cNvPr id="4" name="ZoneTexte 3">
-            <a:extLst>
-              <a:ext uri="{FF2B5EF4-FFF2-40B4-BE49-F238E27FC236}">
-                <a16:creationId xmlns:a16="http://schemas.microsoft.com/office/drawing/2014/main" id="{3D1BC27F-E75F-462E-9F1C-D7F68E2A2A46}"/>
-              </a:ext>
-            </a:extLst>
-          </p:cNvPr>
-          <p:cNvSpPr txBox="1"/>
-          <p:nvPr/>
-        </p:nvSpPr>
-        <p:spPr>
-          <a:xfrm>
-            <a:off x="1658112" y="3041976"/>
-            <a:ext cx="2523744" cy="338554"/>
-          </a:xfrm>
-          <a:prstGeom prst="rect">
-            <a:avLst/>
-          </a:prstGeom>
-          <a:noFill/>
-        </p:spPr>
-        <p:txBody>
-          <a:bodyPr wrap="square" rtlCol="0">
-            <a:spAutoFit/>
-          </a:bodyPr>
-          <a:lstStyle/>
-          <a:p>
-            <a:r>
-              <a:rPr lang="fr-CA" sz="1600" dirty="0">
-                <a:solidFill>
-                  <a:srgbClr val="FA4098"/>
-                </a:solidFill>
-              </a:rPr>
-              <a:t>Premier élément à retirer</a:t>
-            </a:r>
-          </a:p>
-        </p:txBody>
-      </p:sp>
-      <p:sp>
-        <p:nvSpPr>
-          <p:cNvPr id="5" name="ZoneTexte 4">
-            <a:extLst>
-              <a:ext uri="{FF2B5EF4-FFF2-40B4-BE49-F238E27FC236}">
-                <a16:creationId xmlns:a16="http://schemas.microsoft.com/office/drawing/2014/main" id="{030EB4F6-9922-43AB-B8E2-AFB3AEE8E395}"/>
-              </a:ext>
-            </a:extLst>
-          </p:cNvPr>
-          <p:cNvSpPr txBox="1"/>
-          <p:nvPr/>
-        </p:nvSpPr>
-        <p:spPr>
-          <a:xfrm>
-            <a:off x="4056888" y="3045024"/>
-            <a:ext cx="3532632" cy="338554"/>
-          </a:xfrm>
-          <a:prstGeom prst="rect">
-            <a:avLst/>
-          </a:prstGeom>
-          <a:noFill/>
-        </p:spPr>
-        <p:txBody>
-          <a:bodyPr wrap="square" rtlCol="0">
-            <a:spAutoFit/>
-          </a:bodyPr>
-          <a:lstStyle/>
-          <a:p>
-            <a:r>
-              <a:rPr lang="fr-CA" sz="1600" dirty="0">
-                <a:solidFill>
-                  <a:srgbClr val="FA4098"/>
-                </a:solidFill>
-              </a:rPr>
-              <a:t>Combien d’élément on retire au total ?</a:t>
-            </a:r>
-          </a:p>
-        </p:txBody>
-      </p:sp>
-      <p:cxnSp>
-        <p:nvCxnSpPr>
-          <p:cNvPr id="6" name="Connecteur droit avec flèche 5">
-            <a:extLst>
-              <a:ext uri="{FF2B5EF4-FFF2-40B4-BE49-F238E27FC236}">
-                <a16:creationId xmlns:a16="http://schemas.microsoft.com/office/drawing/2014/main" id="{FB8A3C45-5B96-4EFE-ABC6-26389131C31D}"/>
-              </a:ext>
-            </a:extLst>
-          </p:cNvPr>
-          <p:cNvCxnSpPr>
-            <a:cxnSpLocks/>
-          </p:cNvCxnSpPr>
-          <p:nvPr/>
-        </p:nvCxnSpPr>
-        <p:spPr>
-          <a:xfrm flipV="1">
-            <a:off x="3596640" y="2775210"/>
-            <a:ext cx="1048512" cy="266766"/>
-          </a:xfrm>
-          <a:prstGeom prst="straightConnector1">
-            <a:avLst/>
-          </a:prstGeom>
-          <a:ln w="38100">
-            <a:solidFill>
-              <a:srgbClr val="FA4098"/>
-            </a:solidFill>
-            <a:tailEnd type="triangle"/>
-          </a:ln>
-        </p:spPr>
-        <p:style>
-          <a:lnRef idx="1">
-            <a:schemeClr val="accent1"/>
-          </a:lnRef>
-          <a:fillRef idx="0">
-            <a:schemeClr val="accent1"/>
-          </a:fillRef>
-          <a:effectRef idx="0">
-            <a:schemeClr val="accent1"/>
-          </a:effectRef>
-          <a:fontRef idx="minor">
-            <a:schemeClr val="tx1"/>
-          </a:fontRef>
-        </p:style>
-      </p:cxnSp>
-      <p:cxnSp>
-        <p:nvCxnSpPr>
-          <p:cNvPr id="7" name="Connecteur droit avec flèche 6">
-            <a:extLst>
-              <a:ext uri="{FF2B5EF4-FFF2-40B4-BE49-F238E27FC236}">
-                <a16:creationId xmlns:a16="http://schemas.microsoft.com/office/drawing/2014/main" id="{90F7FA89-8559-4583-8148-A37435E170E6}"/>
-              </a:ext>
-            </a:extLst>
-          </p:cNvPr>
-          <p:cNvCxnSpPr>
-            <a:cxnSpLocks/>
-            <a:stCxn id="5" idx="0"/>
-          </p:cNvCxnSpPr>
-          <p:nvPr/>
-        </p:nvCxnSpPr>
-        <p:spPr>
-          <a:xfrm flipV="1">
-            <a:off x="5823204" y="2775210"/>
-            <a:ext cx="230124" cy="269814"/>
-          </a:xfrm>
-          <a:prstGeom prst="straightConnector1">
-            <a:avLst/>
-          </a:prstGeom>
-          <a:ln w="38100">
-            <a:solidFill>
-              <a:srgbClr val="FA4098"/>
-            </a:solidFill>
-            <a:tailEnd type="triangle"/>
-          </a:ln>
-        </p:spPr>
-        <p:style>
-          <a:lnRef idx="1">
-            <a:schemeClr val="accent1"/>
-          </a:lnRef>
-          <a:fillRef idx="0">
-            <a:schemeClr val="accent1"/>
-          </a:fillRef>
-          <a:effectRef idx="0">
-            <a:schemeClr val="accent1"/>
-          </a:effectRef>
-          <a:fontRef idx="minor">
-            <a:schemeClr val="tx1"/>
-          </a:fontRef>
-        </p:style>
-      </p:cxnSp>
-      <p:sp>
-        <p:nvSpPr>
-          <p:cNvPr id="8" name="ZoneTexte 7">
-            <a:extLst>
-              <a:ext uri="{FF2B5EF4-FFF2-40B4-BE49-F238E27FC236}">
-                <a16:creationId xmlns:a16="http://schemas.microsoft.com/office/drawing/2014/main" id="{9C576597-D638-4D67-89AE-4B7AC8FE4C71}"/>
-              </a:ext>
-            </a:extLst>
-          </p:cNvPr>
-          <p:cNvSpPr txBox="1"/>
-          <p:nvPr/>
-        </p:nvSpPr>
-        <p:spPr>
-          <a:xfrm>
-            <a:off x="8049216" y="3041976"/>
-            <a:ext cx="3532632" cy="338554"/>
-          </a:xfrm>
-          <a:prstGeom prst="rect">
-            <a:avLst/>
-          </a:prstGeom>
-          <a:noFill/>
-        </p:spPr>
-        <p:txBody>
-          <a:bodyPr wrap="square" rtlCol="0">
-            <a:spAutoFit/>
-          </a:bodyPr>
-          <a:lstStyle/>
-          <a:p>
-            <a:r>
-              <a:rPr lang="fr-CA" sz="1600" dirty="0">
-                <a:solidFill>
-                  <a:srgbClr val="FA4098"/>
-                </a:solidFill>
-              </a:rPr>
-              <a:t>Valeurs à ajouter dans le tableau.</a:t>
-            </a:r>
-          </a:p>
-        </p:txBody>
-      </p:sp>
-      <p:cxnSp>
-        <p:nvCxnSpPr>
-          <p:cNvPr id="9" name="Connecteur droit avec flèche 8">
-            <a:extLst>
-              <a:ext uri="{FF2B5EF4-FFF2-40B4-BE49-F238E27FC236}">
-                <a16:creationId xmlns:a16="http://schemas.microsoft.com/office/drawing/2014/main" id="{CD41562A-623E-4E16-9639-2FEC96E9C213}"/>
-              </a:ext>
-            </a:extLst>
-          </p:cNvPr>
-          <p:cNvCxnSpPr>
-            <a:cxnSpLocks/>
-          </p:cNvCxnSpPr>
-          <p:nvPr/>
-        </p:nvCxnSpPr>
-        <p:spPr>
-          <a:xfrm flipH="1" flipV="1">
-            <a:off x="8049216" y="2775210"/>
-            <a:ext cx="998772" cy="294270"/>
-          </a:xfrm>
-          <a:prstGeom prst="straightConnector1">
-            <a:avLst/>
-          </a:prstGeom>
-          <a:ln w="38100">
-            <a:solidFill>
-              <a:srgbClr val="FA4098"/>
-            </a:solidFill>
-            <a:tailEnd type="triangle"/>
-          </a:ln>
-        </p:spPr>
-        <p:style>
-          <a:lnRef idx="1">
-            <a:schemeClr val="accent1"/>
-          </a:lnRef>
-          <a:fillRef idx="0">
-            <a:schemeClr val="accent1"/>
-          </a:fillRef>
-          <a:effectRef idx="0">
-            <a:schemeClr val="accent1"/>
-          </a:effectRef>
-          <a:fontRef idx="minor">
-            <a:schemeClr val="tx1"/>
-          </a:fontRef>
-        </p:style>
-      </p:cxnSp>
-      <p:cxnSp>
-        <p:nvCxnSpPr>
-          <p:cNvPr id="10" name="Connecteur droit avec flèche 9">
-            <a:extLst>
-              <a:ext uri="{FF2B5EF4-FFF2-40B4-BE49-F238E27FC236}">
-                <a16:creationId xmlns:a16="http://schemas.microsoft.com/office/drawing/2014/main" id="{55C60820-A3E2-4864-A8DD-19DDDCF8B3A4}"/>
-              </a:ext>
-            </a:extLst>
-          </p:cNvPr>
-          <p:cNvCxnSpPr>
-            <a:cxnSpLocks/>
-          </p:cNvCxnSpPr>
-          <p:nvPr/>
-        </p:nvCxnSpPr>
-        <p:spPr>
-          <a:xfrm flipH="1" flipV="1">
-            <a:off x="8970474" y="2761458"/>
-            <a:ext cx="260394" cy="308022"/>
-          </a:xfrm>
-          <a:prstGeom prst="straightConnector1">
-            <a:avLst/>
-          </a:prstGeom>
-          <a:ln w="38100">
-            <a:solidFill>
-              <a:srgbClr val="FA4098"/>
-            </a:solidFill>
-            <a:tailEnd type="triangle"/>
-          </a:ln>
-        </p:spPr>
-        <p:style>
-          <a:lnRef idx="1">
-            <a:schemeClr val="accent1"/>
-          </a:lnRef>
-          <a:fillRef idx="0">
-            <a:schemeClr val="accent1"/>
-          </a:fillRef>
-          <a:effectRef idx="0">
-            <a:schemeClr val="accent1"/>
-          </a:effectRef>
-          <a:fontRef idx="minor">
-            <a:schemeClr val="tx1"/>
-          </a:fontRef>
-        </p:style>
-      </p:cxnSp>
-      <p:sp>
-        <p:nvSpPr>
-          <p:cNvPr id="12" name="ZoneTexte 11">
-            <a:extLst>
-              <a:ext uri="{FF2B5EF4-FFF2-40B4-BE49-F238E27FC236}">
-                <a16:creationId xmlns:a16="http://schemas.microsoft.com/office/drawing/2014/main" id="{E92793FE-015B-49A1-965D-51BB638A37B4}"/>
-              </a:ext>
-            </a:extLst>
-          </p:cNvPr>
-          <p:cNvSpPr txBox="1"/>
-          <p:nvPr/>
-        </p:nvSpPr>
-        <p:spPr>
-          <a:xfrm>
-            <a:off x="4583640" y="5628994"/>
-            <a:ext cx="5801382" cy="369332"/>
-          </a:xfrm>
-          <a:prstGeom prst="rect">
-            <a:avLst/>
-          </a:prstGeom>
-          <a:noFill/>
-        </p:spPr>
-        <p:txBody>
-          <a:bodyPr wrap="square">
-            <a:spAutoFit/>
-          </a:bodyPr>
-          <a:lstStyle/>
-          <a:p>
-            <a:r>
-              <a:rPr lang="fr-CA" b="1">
-                <a:solidFill>
-                  <a:schemeClr val="tx1"/>
-                </a:solidFill>
-                <a:latin typeface="Courier New" panose="02070309020205020404" pitchFamily="49" charset="0"/>
-                <a:cs typeface="Courier New" panose="02070309020205020404" pitchFamily="49" charset="0"/>
-              </a:rPr>
-              <a:t>["Bleu",   "Rouge", "Jaune", "Vert"]</a:t>
-            </a:r>
-            <a:endParaRPr lang="fr-CA" b="1" dirty="0">
-              <a:solidFill>
-                <a:schemeClr val="tx1"/>
-              </a:solidFill>
-              <a:latin typeface="Courier New" panose="02070309020205020404" pitchFamily="49" charset="0"/>
-              <a:cs typeface="Courier New" panose="02070309020205020404" pitchFamily="49" charset="0"/>
-            </a:endParaRPr>
-          </a:p>
-        </p:txBody>
-      </p:sp>
-      <p:sp>
-        <p:nvSpPr>
-          <p:cNvPr id="13" name="Rectangle 12">
-            <a:extLst>
-              <a:ext uri="{FF2B5EF4-FFF2-40B4-BE49-F238E27FC236}">
-                <a16:creationId xmlns:a16="http://schemas.microsoft.com/office/drawing/2014/main" id="{37ACDBB9-B8B1-4343-A62F-DB12E0AAA47C}"/>
-              </a:ext>
-            </a:extLst>
-          </p:cNvPr>
-          <p:cNvSpPr/>
-          <p:nvPr/>
-        </p:nvSpPr>
-        <p:spPr>
-          <a:xfrm>
-            <a:off x="6128490" y="5621443"/>
-            <a:ext cx="2420112" cy="369332"/>
-          </a:xfrm>
-          <a:prstGeom prst="rect">
-            <a:avLst/>
-          </a:prstGeom>
-          <a:noFill/>
-          <a:ln w="19050">
-            <a:solidFill>
-              <a:srgbClr val="FA4098"/>
-            </a:solidFill>
-            <a:prstDash val="sysDash"/>
-          </a:ln>
-        </p:spPr>
-        <p:style>
-          <a:lnRef idx="2">
-            <a:schemeClr val="accent1">
-              <a:shade val="50000"/>
-            </a:schemeClr>
-          </a:lnRef>
-          <a:fillRef idx="1">
-            <a:schemeClr val="accent1"/>
-          </a:fillRef>
-          <a:effectRef idx="0">
-            <a:schemeClr val="accent1"/>
-          </a:effectRef>
-          <a:fontRef idx="minor">
-            <a:schemeClr val="lt1"/>
-          </a:fontRef>
-        </p:style>
-        <p:txBody>
-          <a:bodyPr rtlCol="0" anchor="ctr"/>
-          <a:lstStyle/>
-          <a:p>
-            <a:pPr algn="ctr"/>
-            <a:endParaRPr lang="fr-CA"/>
-          </a:p>
-        </p:txBody>
-      </p:sp>
-      <p:sp>
-        <p:nvSpPr>
-          <p:cNvPr id="15" name="ZoneTexte 14">
-            <a:extLst>
-              <a:ext uri="{FF2B5EF4-FFF2-40B4-BE49-F238E27FC236}">
-                <a16:creationId xmlns:a16="http://schemas.microsoft.com/office/drawing/2014/main" id="{F1163288-3293-47AF-916F-3DA3CB506C7E}"/>
-              </a:ext>
-            </a:extLst>
-          </p:cNvPr>
-          <p:cNvSpPr txBox="1"/>
-          <p:nvPr/>
-        </p:nvSpPr>
-        <p:spPr>
-          <a:xfrm>
-            <a:off x="8056074" y="5125727"/>
-            <a:ext cx="914400" cy="369332"/>
-          </a:xfrm>
-          <a:prstGeom prst="rect">
-            <a:avLst/>
-          </a:prstGeom>
-          <a:noFill/>
-        </p:spPr>
-        <p:txBody>
-          <a:bodyPr wrap="square" rtlCol="0">
-            <a:spAutoFit/>
-          </a:bodyPr>
-          <a:lstStyle/>
-          <a:p>
-            <a:r>
-              <a:rPr lang="en-CA"/>
-              <a:t>❌</a:t>
-            </a:r>
-            <a:endParaRPr lang="fr-CA"/>
-          </a:p>
-        </p:txBody>
-      </p:sp>
-      <p:cxnSp>
-        <p:nvCxnSpPr>
-          <p:cNvPr id="17" name="Connecteur : en arc 16">
-            <a:extLst>
-              <a:ext uri="{FF2B5EF4-FFF2-40B4-BE49-F238E27FC236}">
-                <a16:creationId xmlns:a16="http://schemas.microsoft.com/office/drawing/2014/main" id="{98C5472F-C000-4D96-A4AE-46EAEADA30FD}"/>
-              </a:ext>
-            </a:extLst>
-          </p:cNvPr>
-          <p:cNvCxnSpPr>
-            <a:cxnSpLocks/>
-            <a:stCxn id="13" idx="0"/>
-            <a:endCxn id="15" idx="1"/>
-          </p:cNvCxnSpPr>
-          <p:nvPr/>
-        </p:nvCxnSpPr>
-        <p:spPr>
-          <a:xfrm rot="5400000" flipH="1" flipV="1">
-            <a:off x="7541785" y="5107154"/>
-            <a:ext cx="311050" cy="717528"/>
-          </a:xfrm>
-          <a:prstGeom prst="curvedConnector2">
-            <a:avLst/>
-          </a:prstGeom>
-          <a:ln w="57150">
-            <a:solidFill>
-              <a:srgbClr val="FA4098"/>
-            </a:solidFill>
-            <a:tailEnd type="triangle"/>
-          </a:ln>
-        </p:spPr>
-        <p:style>
-          <a:lnRef idx="1">
-            <a:schemeClr val="accent1"/>
-          </a:lnRef>
-          <a:fillRef idx="0">
-            <a:schemeClr val="accent1"/>
-          </a:fillRef>
-          <a:effectRef idx="0">
-            <a:schemeClr val="accent1"/>
-          </a:effectRef>
-          <a:fontRef idx="minor">
-            <a:schemeClr val="tx1"/>
-          </a:fontRef>
-        </p:style>
-      </p:cxnSp>
-      <p:sp>
-        <p:nvSpPr>
-          <p:cNvPr id="20" name="ZoneTexte 19">
-            <a:extLst>
-              <a:ext uri="{FF2B5EF4-FFF2-40B4-BE49-F238E27FC236}">
-                <a16:creationId xmlns:a16="http://schemas.microsoft.com/office/drawing/2014/main" id="{D45304E1-DF09-4960-AD14-48B3A8B65A44}"/>
-              </a:ext>
-            </a:extLst>
-          </p:cNvPr>
-          <p:cNvSpPr txBox="1"/>
-          <p:nvPr/>
-        </p:nvSpPr>
-        <p:spPr>
-          <a:xfrm>
-            <a:off x="3711426" y="6341165"/>
-            <a:ext cx="2417064" cy="369332"/>
-          </a:xfrm>
-          <a:prstGeom prst="rect">
-            <a:avLst/>
-          </a:prstGeom>
-          <a:noFill/>
-        </p:spPr>
-        <p:txBody>
-          <a:bodyPr wrap="square">
-            <a:spAutoFit/>
-          </a:bodyPr>
-          <a:lstStyle/>
-          <a:p>
-            <a:r>
-              <a:rPr lang="fr-CA" sz="1800" b="1">
-                <a:latin typeface="Courier New" panose="02070309020205020404" pitchFamily="49" charset="0"/>
-                <a:cs typeface="Courier New" panose="02070309020205020404" pitchFamily="49" charset="0"/>
-              </a:rPr>
-              <a:t>"Beige", "Lilas"</a:t>
-            </a:r>
-            <a:endParaRPr lang="fr-CA"/>
-          </a:p>
-        </p:txBody>
-      </p:sp>
-      <p:cxnSp>
-        <p:nvCxnSpPr>
-          <p:cNvPr id="23" name="Connecteur : en arc 22">
-            <a:extLst>
-              <a:ext uri="{FF2B5EF4-FFF2-40B4-BE49-F238E27FC236}">
-                <a16:creationId xmlns:a16="http://schemas.microsoft.com/office/drawing/2014/main" id="{8FE9E509-7322-4828-BE44-151210BA71A0}"/>
-              </a:ext>
-            </a:extLst>
-          </p:cNvPr>
-          <p:cNvCxnSpPr>
-            <a:cxnSpLocks/>
-            <a:stCxn id="20" idx="0"/>
-            <a:endCxn id="31" idx="2"/>
-          </p:cNvCxnSpPr>
-          <p:nvPr/>
-        </p:nvCxnSpPr>
-        <p:spPr>
-          <a:xfrm rot="5400000" flipH="1" flipV="1">
-            <a:off x="5227860" y="5652095"/>
-            <a:ext cx="381168" cy="996972"/>
-          </a:xfrm>
-          <a:prstGeom prst="curvedConnector3">
-            <a:avLst>
-              <a:gd name="adj1" fmla="val 50000"/>
-            </a:avLst>
-          </a:prstGeom>
-          <a:ln w="57150">
-            <a:solidFill>
-              <a:srgbClr val="FA4098"/>
-            </a:solidFill>
-            <a:tailEnd type="triangle"/>
-          </a:ln>
-        </p:spPr>
-        <p:style>
-          <a:lnRef idx="1">
-            <a:schemeClr val="accent1"/>
-          </a:lnRef>
-          <a:fillRef idx="0">
-            <a:schemeClr val="accent1"/>
-          </a:fillRef>
-          <a:effectRef idx="0">
-            <a:schemeClr val="accent1"/>
-          </a:effectRef>
-          <a:fontRef idx="minor">
-            <a:schemeClr val="tx1"/>
-          </a:fontRef>
-        </p:style>
-      </p:cxnSp>
-      <p:sp>
-        <p:nvSpPr>
-          <p:cNvPr id="31" name="Rectangle 30">
-            <a:extLst>
-              <a:ext uri="{FF2B5EF4-FFF2-40B4-BE49-F238E27FC236}">
-                <a16:creationId xmlns:a16="http://schemas.microsoft.com/office/drawing/2014/main" id="{CA56C900-3E74-4DE1-A13A-262B8DAEF88B}"/>
-              </a:ext>
-            </a:extLst>
-          </p:cNvPr>
-          <p:cNvSpPr/>
-          <p:nvPr/>
-        </p:nvSpPr>
-        <p:spPr>
-          <a:xfrm>
-            <a:off x="5823204" y="5621443"/>
-            <a:ext cx="187452" cy="338554"/>
-          </a:xfrm>
-          <a:prstGeom prst="rect">
-            <a:avLst/>
-          </a:prstGeom>
-          <a:noFill/>
-          <a:ln>
-            <a:noFill/>
-          </a:ln>
-        </p:spPr>
-        <p:style>
-          <a:lnRef idx="2">
-            <a:schemeClr val="accent1">
-              <a:shade val="50000"/>
-            </a:schemeClr>
-          </a:lnRef>
-          <a:fillRef idx="1">
-            <a:schemeClr val="accent1"/>
-          </a:fillRef>
-          <a:effectRef idx="0">
-            <a:schemeClr val="accent1"/>
-          </a:effectRef>
-          <a:fontRef idx="minor">
-            <a:schemeClr val="lt1"/>
-          </a:fontRef>
-        </p:style>
-        <p:txBody>
-          <a:bodyPr rtlCol="0" anchor="ctr"/>
-          <a:lstStyle/>
-          <a:p>
-            <a:pPr algn="ctr"/>
-            <a:endParaRPr lang="fr-CA"/>
-          </a:p>
-        </p:txBody>
-      </p:sp>
-    </p:spTree>
-    <p:extLst>
-      <p:ext uri="{BB962C8B-B14F-4D97-AF65-F5344CB8AC3E}">
-        <p14:creationId xmlns:p14="http://schemas.microsoft.com/office/powerpoint/2010/main" val="2363420132"/>
-      </p:ext>
-    </p:extLst>
-  </p:cSld>
-  <p:clrMapOvr>
-    <a:masterClrMapping/>
-  </p:clrMapOvr>
-</p:sld>
-</file>
-
-<file path=ppt/slides/slide19.xml><?xml version="1.0" encoding="utf-8"?>
 <p:sld xmlns:a="http://schemas.openxmlformats.org/drawingml/2006/main" xmlns:r="http://schemas.openxmlformats.org/officeDocument/2006/relationships" xmlns:p="http://schemas.openxmlformats.org/presentationml/2006/main">
   <p:cSld>
     <p:spTree>
@@ -7742,6 +5332,1058 @@
     <p:extLst>
       <p:ext uri="{BB962C8B-B14F-4D97-AF65-F5344CB8AC3E}">
         <p14:creationId xmlns:p14="http://schemas.microsoft.com/office/powerpoint/2010/main" val="4273421812"/>
+      </p:ext>
+    </p:extLst>
+  </p:cSld>
+  <p:clrMapOvr>
+    <a:masterClrMapping/>
+  </p:clrMapOvr>
+</p:sld>
+</file>
+
+<file path=ppt/slides/slide17.xml><?xml version="1.0" encoding="utf-8"?>
+<p:sld xmlns:a="http://schemas.openxmlformats.org/drawingml/2006/main" xmlns:r="http://schemas.openxmlformats.org/officeDocument/2006/relationships" xmlns:p="http://schemas.openxmlformats.org/presentationml/2006/main">
+  <p:cSld>
+    <p:spTree>
+      <p:nvGrpSpPr>
+        <p:cNvPr id="1" name=""/>
+        <p:cNvGrpSpPr/>
+        <p:nvPr/>
+      </p:nvGrpSpPr>
+      <p:grpSpPr>
+        <a:xfrm>
+          <a:off x="0" y="0"/>
+          <a:ext cx="0" cy="0"/>
+          <a:chOff x="0" y="0"/>
+          <a:chExt cx="0" cy="0"/>
+        </a:xfrm>
+      </p:grpSpPr>
+      <p:sp>
+        <p:nvSpPr>
+          <p:cNvPr id="2" name="Espace réservé du contenu 1">
+            <a:extLst>
+              <a:ext uri="{FF2B5EF4-FFF2-40B4-BE49-F238E27FC236}">
+                <a16:creationId xmlns:a16="http://schemas.microsoft.com/office/drawing/2014/main" id="{16BA42F2-30AC-47F9-9BC8-81B4CF62852A}"/>
+              </a:ext>
+            </a:extLst>
+          </p:cNvPr>
+          <p:cNvSpPr>
+            <a:spLocks noGrp="1"/>
+          </p:cNvSpPr>
+          <p:nvPr>
+            <p:ph idx="1"/>
+          </p:nvPr>
+        </p:nvSpPr>
+        <p:spPr/>
+        <p:txBody>
+          <a:bodyPr/>
+          <a:lstStyle/>
+          <a:p>
+            <a:r>
+              <a:rPr lang="fr-CA" dirty="0"/>
+              <a:t> </a:t>
+            </a:r>
+            <a:r>
+              <a:rPr lang="fr-CA" b="1" dirty="0"/>
+              <a:t>Parcourir un </a:t>
+            </a:r>
+            <a:r>
+              <a:rPr lang="fr-CA" b="1" dirty="0">
+                <a:solidFill>
+                  <a:srgbClr val="FA4098"/>
+                </a:solidFill>
+              </a:rPr>
+              <a:t>tableau</a:t>
+            </a:r>
+            <a:r>
+              <a:rPr lang="fr-CA" b="1" dirty="0"/>
+              <a:t> </a:t>
+            </a:r>
+            <a:r>
+              <a:rPr lang="fr-CA" dirty="0"/>
+              <a:t>à l’aide d’une </a:t>
+            </a:r>
+            <a:r>
+              <a:rPr lang="fr-CA" b="1" dirty="0">
+                <a:solidFill>
+                  <a:srgbClr val="FA4098"/>
+                </a:solidFill>
+              </a:rPr>
+              <a:t>boucle</a:t>
+            </a:r>
+          </a:p>
+          <a:p>
+            <a:pPr lvl="1"/>
+            <a:r>
+              <a:rPr lang="fr-CA" dirty="0"/>
+              <a:t> Dans de nombreuses situations, il faut </a:t>
+            </a:r>
+            <a:r>
+              <a:rPr lang="fr-CA" b="1" dirty="0"/>
+              <a:t>parcourir un tableau en entier</a:t>
+            </a:r>
+            <a:r>
+              <a:rPr lang="fr-CA" dirty="0"/>
+              <a:t>...</a:t>
+            </a:r>
+          </a:p>
+          <a:p>
+            <a:pPr lvl="2"/>
+            <a:r>
+              <a:rPr lang="fr-CA" sz="1800" dirty="0"/>
+              <a:t> Afficher tous les éléments</a:t>
+            </a:r>
+          </a:p>
+          <a:p>
+            <a:pPr lvl="2"/>
+            <a:r>
+              <a:rPr lang="fr-CA" sz="1800" dirty="0"/>
+              <a:t> Calculer la somme ou la moyenne</a:t>
+            </a:r>
+          </a:p>
+          <a:p>
+            <a:pPr lvl="2"/>
+            <a:r>
+              <a:rPr lang="fr-CA" sz="1800" dirty="0"/>
+              <a:t> Trouver le maximum / minimum</a:t>
+            </a:r>
+          </a:p>
+          <a:p>
+            <a:pPr lvl="2"/>
+            <a:r>
+              <a:rPr lang="fr-CA" sz="1800" dirty="0"/>
+              <a:t> Trier les éléments par ordre croissant / alphabétique</a:t>
+            </a:r>
+          </a:p>
+          <a:p>
+            <a:pPr lvl="2"/>
+            <a:r>
+              <a:rPr lang="fr-CA" sz="1800" dirty="0"/>
+              <a:t> etc.</a:t>
+            </a:r>
+          </a:p>
+          <a:p>
+            <a:pPr lvl="2"/>
+            <a:endParaRPr lang="fr-CA" dirty="0"/>
+          </a:p>
+          <a:p>
+            <a:pPr lvl="1"/>
+            <a:r>
+              <a:rPr lang="fr-CA" dirty="0"/>
+              <a:t> Une </a:t>
+            </a:r>
+            <a:r>
+              <a:rPr lang="fr-CA" b="1" dirty="0">
+                <a:solidFill>
+                  <a:srgbClr val="FA4098"/>
+                </a:solidFill>
+              </a:rPr>
+              <a:t>boucle</a:t>
+            </a:r>
+            <a:r>
+              <a:rPr lang="fr-CA" dirty="0"/>
+              <a:t> qui sert à parcourir un </a:t>
+            </a:r>
+            <a:r>
+              <a:rPr lang="fr-CA" b="1" dirty="0">
+                <a:solidFill>
+                  <a:srgbClr val="FA4098"/>
+                </a:solidFill>
+              </a:rPr>
+              <a:t>tableau</a:t>
+            </a:r>
+            <a:r>
+              <a:rPr lang="fr-CA" dirty="0"/>
+              <a:t> ressemblera toujours à ceci</a:t>
+            </a:r>
+          </a:p>
+          <a:p>
+            <a:pPr lvl="2"/>
+            <a:r>
+              <a:rPr lang="fr-CA" dirty="0"/>
+              <a:t> Ça ressemble à une boucle </a:t>
+            </a:r>
+            <a:r>
+              <a:rPr lang="fr-CA" dirty="0">
+                <a:solidFill>
+                  <a:srgbClr val="FA4098"/>
+                </a:solidFill>
+              </a:rPr>
+              <a:t>for</a:t>
+            </a:r>
+            <a:r>
+              <a:rPr lang="fr-CA" dirty="0"/>
+              <a:t>, mais c’est un autre format adapté aux tableaux.</a:t>
+            </a:r>
+          </a:p>
+        </p:txBody>
+      </p:sp>
+      <p:sp>
+        <p:nvSpPr>
+          <p:cNvPr id="3" name="Titre 2">
+            <a:extLst>
+              <a:ext uri="{FF2B5EF4-FFF2-40B4-BE49-F238E27FC236}">
+                <a16:creationId xmlns:a16="http://schemas.microsoft.com/office/drawing/2014/main" id="{0D6EA1B8-984F-4384-8240-8CBD711239DD}"/>
+              </a:ext>
+            </a:extLst>
+          </p:cNvPr>
+          <p:cNvSpPr>
+            <a:spLocks noGrp="1"/>
+          </p:cNvSpPr>
+          <p:nvPr>
+            <p:ph type="title"/>
+          </p:nvPr>
+        </p:nvSpPr>
+        <p:spPr/>
+        <p:txBody>
+          <a:bodyPr/>
+          <a:lstStyle/>
+          <a:p>
+            <a:r>
+              <a:rPr lang="fr-CA" dirty="0"/>
+              <a:t>Boucles et tableaux</a:t>
+            </a:r>
+          </a:p>
+        </p:txBody>
+      </p:sp>
+      <p:pic>
+        <p:nvPicPr>
+          <p:cNvPr id="9" name="Image 8">
+            <a:extLst>
+              <a:ext uri="{FF2B5EF4-FFF2-40B4-BE49-F238E27FC236}">
+                <a16:creationId xmlns:a16="http://schemas.microsoft.com/office/drawing/2014/main" id="{680913DA-1D73-403E-9884-52CAAA416413}"/>
+              </a:ext>
+            </a:extLst>
+          </p:cNvPr>
+          <p:cNvPicPr>
+            <a:picLocks noChangeAspect="1"/>
+          </p:cNvPicPr>
+          <p:nvPr/>
+        </p:nvPicPr>
+        <p:blipFill>
+          <a:blip r:embed="rId2"/>
+          <a:stretch>
+            <a:fillRect/>
+          </a:stretch>
+        </p:blipFill>
+        <p:spPr>
+          <a:xfrm>
+            <a:off x="4112723" y="5558702"/>
+            <a:ext cx="3962953" cy="1038370"/>
+          </a:xfrm>
+          <a:prstGeom prst="rect">
+            <a:avLst/>
+          </a:prstGeom>
+          <a:ln w="28575">
+            <a:solidFill>
+              <a:srgbClr val="7385D1"/>
+            </a:solidFill>
+          </a:ln>
+        </p:spPr>
+      </p:pic>
+      <p:sp>
+        <p:nvSpPr>
+          <p:cNvPr id="10" name="ZoneTexte 9">
+            <a:extLst>
+              <a:ext uri="{FF2B5EF4-FFF2-40B4-BE49-F238E27FC236}">
+                <a16:creationId xmlns:a16="http://schemas.microsoft.com/office/drawing/2014/main" id="{5192B0B1-5CF0-442B-96E1-10FCFE60F06E}"/>
+              </a:ext>
+            </a:extLst>
+          </p:cNvPr>
+          <p:cNvSpPr txBox="1"/>
+          <p:nvPr/>
+        </p:nvSpPr>
+        <p:spPr>
+          <a:xfrm>
+            <a:off x="6933372" y="4630763"/>
+            <a:ext cx="4783140" cy="646331"/>
+          </a:xfrm>
+          <a:prstGeom prst="rect">
+            <a:avLst/>
+          </a:prstGeom>
+          <a:solidFill>
+            <a:srgbClr val="7385D1">
+              <a:alpha val="20000"/>
+            </a:srgbClr>
+          </a:solidFill>
+        </p:spPr>
+        <p:txBody>
+          <a:bodyPr wrap="square" rtlCol="0">
+            <a:spAutoFit/>
+          </a:bodyPr>
+          <a:lstStyle/>
+          <a:p>
+            <a:r>
+              <a:rPr lang="fr-CA" dirty="0">
+                <a:solidFill>
+                  <a:srgbClr val="FA4098"/>
+                </a:solidFill>
+              </a:rPr>
+              <a:t>monTableau</a:t>
+            </a:r>
+            <a:r>
+              <a:rPr lang="fr-CA" dirty="0">
+                <a:solidFill>
+                  <a:srgbClr val="7385D1"/>
+                </a:solidFill>
+              </a:rPr>
+              <a:t> est une variable qui contient un tableau</a:t>
+            </a:r>
+          </a:p>
+        </p:txBody>
+      </p:sp>
+      <p:sp>
+        <p:nvSpPr>
+          <p:cNvPr id="14" name="ZoneTexte 13">
+            <a:extLst>
+              <a:ext uri="{FF2B5EF4-FFF2-40B4-BE49-F238E27FC236}">
+                <a16:creationId xmlns:a16="http://schemas.microsoft.com/office/drawing/2014/main" id="{04DCCE49-887B-4B2E-816A-B6FE40E4EBCE}"/>
+              </a:ext>
+            </a:extLst>
+          </p:cNvPr>
+          <p:cNvSpPr txBox="1"/>
+          <p:nvPr/>
+        </p:nvSpPr>
+        <p:spPr>
+          <a:xfrm>
+            <a:off x="1018584" y="4769263"/>
+            <a:ext cx="5662631" cy="369332"/>
+          </a:xfrm>
+          <a:prstGeom prst="rect">
+            <a:avLst/>
+          </a:prstGeom>
+          <a:solidFill>
+            <a:srgbClr val="7385D1">
+              <a:alpha val="20000"/>
+            </a:srgbClr>
+          </a:solidFill>
+        </p:spPr>
+        <p:txBody>
+          <a:bodyPr wrap="square" rtlCol="0">
+            <a:spAutoFit/>
+          </a:bodyPr>
+          <a:lstStyle/>
+          <a:p>
+            <a:r>
+              <a:rPr lang="fr-CA" dirty="0">
+                <a:solidFill>
+                  <a:srgbClr val="FA4098"/>
+                </a:solidFill>
+              </a:rPr>
+              <a:t>donnee </a:t>
+            </a:r>
+            <a:r>
+              <a:rPr lang="fr-CA">
+                <a:solidFill>
+                  <a:srgbClr val="7385D1"/>
+                </a:solidFill>
+              </a:rPr>
+              <a:t>représente chacune des données du </a:t>
+            </a:r>
+            <a:r>
+              <a:rPr lang="fr-CA" dirty="0">
+                <a:solidFill>
+                  <a:srgbClr val="7385D1"/>
+                </a:solidFill>
+              </a:rPr>
+              <a:t>tableau</a:t>
+            </a:r>
+          </a:p>
+        </p:txBody>
+      </p:sp>
+      <p:cxnSp>
+        <p:nvCxnSpPr>
+          <p:cNvPr id="15" name="Connecteur droit avec flèche 14">
+            <a:extLst>
+              <a:ext uri="{FF2B5EF4-FFF2-40B4-BE49-F238E27FC236}">
+                <a16:creationId xmlns:a16="http://schemas.microsoft.com/office/drawing/2014/main" id="{121BF443-4EE0-434F-B68B-8151AAA3EFD6}"/>
+              </a:ext>
+            </a:extLst>
+          </p:cNvPr>
+          <p:cNvCxnSpPr>
+            <a:cxnSpLocks/>
+          </p:cNvCxnSpPr>
+          <p:nvPr/>
+        </p:nvCxnSpPr>
+        <p:spPr>
+          <a:xfrm flipH="1">
+            <a:off x="7229856" y="5225347"/>
+            <a:ext cx="225552" cy="431741"/>
+          </a:xfrm>
+          <a:prstGeom prst="straightConnector1">
+            <a:avLst/>
+          </a:prstGeom>
+          <a:ln w="57150">
+            <a:solidFill>
+              <a:srgbClr val="FA4098"/>
+            </a:solidFill>
+            <a:tailEnd type="triangle"/>
+          </a:ln>
+        </p:spPr>
+        <p:style>
+          <a:lnRef idx="1">
+            <a:schemeClr val="accent1"/>
+          </a:lnRef>
+          <a:fillRef idx="0">
+            <a:schemeClr val="accent1"/>
+          </a:fillRef>
+          <a:effectRef idx="0">
+            <a:schemeClr val="accent1"/>
+          </a:effectRef>
+          <a:fontRef idx="minor">
+            <a:schemeClr val="tx1"/>
+          </a:fontRef>
+        </p:style>
+      </p:cxnSp>
+      <p:cxnSp>
+        <p:nvCxnSpPr>
+          <p:cNvPr id="17" name="Connecteur droit avec flèche 16">
+            <a:extLst>
+              <a:ext uri="{FF2B5EF4-FFF2-40B4-BE49-F238E27FC236}">
+                <a16:creationId xmlns:a16="http://schemas.microsoft.com/office/drawing/2014/main" id="{80F7D9B2-0514-4CA0-AFBF-FABCD0FF0E0B}"/>
+              </a:ext>
+            </a:extLst>
+          </p:cNvPr>
+          <p:cNvCxnSpPr>
+            <a:cxnSpLocks/>
+          </p:cNvCxnSpPr>
+          <p:nvPr/>
+        </p:nvCxnSpPr>
+        <p:spPr>
+          <a:xfrm>
+            <a:off x="4669536" y="5133487"/>
+            <a:ext cx="741653" cy="535931"/>
+          </a:xfrm>
+          <a:prstGeom prst="straightConnector1">
+            <a:avLst/>
+          </a:prstGeom>
+          <a:ln w="57150">
+            <a:solidFill>
+              <a:srgbClr val="FA4098"/>
+            </a:solidFill>
+            <a:tailEnd type="triangle"/>
+          </a:ln>
+        </p:spPr>
+        <p:style>
+          <a:lnRef idx="1">
+            <a:schemeClr val="accent1"/>
+          </a:lnRef>
+          <a:fillRef idx="0">
+            <a:schemeClr val="accent1"/>
+          </a:fillRef>
+          <a:effectRef idx="0">
+            <a:schemeClr val="accent1"/>
+          </a:effectRef>
+          <a:fontRef idx="minor">
+            <a:schemeClr val="tx1"/>
+          </a:fontRef>
+        </p:style>
+      </p:cxnSp>
+    </p:spTree>
+    <p:extLst>
+      <p:ext uri="{BB962C8B-B14F-4D97-AF65-F5344CB8AC3E}">
+        <p14:creationId xmlns:p14="http://schemas.microsoft.com/office/powerpoint/2010/main" val="2937155545"/>
+      </p:ext>
+    </p:extLst>
+  </p:cSld>
+  <p:clrMapOvr>
+    <a:masterClrMapping/>
+  </p:clrMapOvr>
+</p:sld>
+</file>
+
+<file path=ppt/slides/slide18.xml><?xml version="1.0" encoding="utf-8"?>
+<p:sld xmlns:a="http://schemas.openxmlformats.org/drawingml/2006/main" xmlns:r="http://schemas.openxmlformats.org/officeDocument/2006/relationships" xmlns:p="http://schemas.openxmlformats.org/presentationml/2006/main">
+  <p:cSld>
+    <p:spTree>
+      <p:nvGrpSpPr>
+        <p:cNvPr id="1" name=""/>
+        <p:cNvGrpSpPr/>
+        <p:nvPr/>
+      </p:nvGrpSpPr>
+      <p:grpSpPr>
+        <a:xfrm>
+          <a:off x="0" y="0"/>
+          <a:ext cx="0" cy="0"/>
+          <a:chOff x="0" y="0"/>
+          <a:chExt cx="0" cy="0"/>
+        </a:xfrm>
+      </p:grpSpPr>
+      <p:sp>
+        <p:nvSpPr>
+          <p:cNvPr id="2" name="Espace réservé du contenu 1">
+            <a:extLst>
+              <a:ext uri="{FF2B5EF4-FFF2-40B4-BE49-F238E27FC236}">
+                <a16:creationId xmlns:a16="http://schemas.microsoft.com/office/drawing/2014/main" id="{16BA42F2-30AC-47F9-9BC8-81B4CF62852A}"/>
+              </a:ext>
+            </a:extLst>
+          </p:cNvPr>
+          <p:cNvSpPr>
+            <a:spLocks noGrp="1"/>
+          </p:cNvSpPr>
+          <p:nvPr>
+            <p:ph idx="1"/>
+          </p:nvPr>
+        </p:nvSpPr>
+        <p:spPr>
+          <a:xfrm>
+            <a:off x="838200" y="1150572"/>
+            <a:ext cx="10512000" cy="5640372"/>
+          </a:xfrm>
+        </p:spPr>
+        <p:txBody>
+          <a:bodyPr/>
+          <a:lstStyle/>
+          <a:p>
+            <a:r>
+              <a:rPr lang="fr-CA" dirty="0"/>
+              <a:t> </a:t>
+            </a:r>
+            <a:r>
+              <a:rPr lang="fr-CA" b="1" dirty="0"/>
+              <a:t>Parcourir un </a:t>
+            </a:r>
+            <a:r>
+              <a:rPr lang="fr-CA" b="1" dirty="0">
+                <a:solidFill>
+                  <a:srgbClr val="FA4098"/>
+                </a:solidFill>
+              </a:rPr>
+              <a:t>tableau</a:t>
+            </a:r>
+            <a:r>
+              <a:rPr lang="fr-CA" b="1" dirty="0"/>
+              <a:t> </a:t>
+            </a:r>
+            <a:r>
+              <a:rPr lang="fr-CA" dirty="0"/>
+              <a:t>à l’aide d’une </a:t>
+            </a:r>
+            <a:r>
+              <a:rPr lang="fr-CA" b="1" dirty="0">
+                <a:solidFill>
+                  <a:srgbClr val="FA4098"/>
+                </a:solidFill>
+              </a:rPr>
+              <a:t>boucle</a:t>
+            </a:r>
+          </a:p>
+          <a:p>
+            <a:endParaRPr lang="fr-CA" b="1" dirty="0">
+              <a:solidFill>
+                <a:srgbClr val="FA4098"/>
+              </a:solidFill>
+            </a:endParaRPr>
+          </a:p>
+          <a:p>
+            <a:endParaRPr lang="fr-CA" b="1" dirty="0">
+              <a:solidFill>
+                <a:srgbClr val="FA4098"/>
+              </a:solidFill>
+            </a:endParaRPr>
+          </a:p>
+          <a:p>
+            <a:endParaRPr lang="fr-CA" b="1" dirty="0">
+              <a:solidFill>
+                <a:srgbClr val="FA4098"/>
+              </a:solidFill>
+            </a:endParaRPr>
+          </a:p>
+          <a:p>
+            <a:pPr lvl="1"/>
+            <a:r>
+              <a:rPr lang="fr-CA" dirty="0"/>
+              <a:t> </a:t>
+            </a:r>
+            <a:r>
+              <a:rPr lang="fr-CA" dirty="0">
+                <a:solidFill>
+                  <a:srgbClr val="FA4098"/>
+                </a:solidFill>
+              </a:rPr>
+              <a:t>monTableau</a:t>
+            </a:r>
+            <a:r>
+              <a:rPr lang="fr-CA" dirty="0"/>
+              <a:t> est le nom de la variable qui contient un tableau.</a:t>
+            </a:r>
+          </a:p>
+          <a:p>
+            <a:pPr lvl="2"/>
+            <a:r>
+              <a:rPr lang="fr-CA" dirty="0"/>
+              <a:t> ex.</a:t>
+            </a:r>
+          </a:p>
+          <a:p>
+            <a:pPr lvl="2"/>
+            <a:endParaRPr lang="fr-CA" dirty="0"/>
+          </a:p>
+          <a:p>
+            <a:pPr lvl="1"/>
+            <a:r>
+              <a:rPr lang="fr-CA" dirty="0"/>
+              <a:t> </a:t>
+            </a:r>
+            <a:r>
+              <a:rPr lang="fr-CA" dirty="0">
+                <a:solidFill>
+                  <a:srgbClr val="FA4098"/>
+                </a:solidFill>
+              </a:rPr>
+              <a:t>donnee</a:t>
+            </a:r>
+            <a:r>
+              <a:rPr lang="fr-CA" dirty="0"/>
+              <a:t> est une variable locale spéciale qui représente chaque donnée du tableau, une à la fois, à travers les itérations.</a:t>
+            </a:r>
+          </a:p>
+          <a:p>
+            <a:pPr lvl="2"/>
+            <a:r>
+              <a:rPr lang="fr-CA" dirty="0"/>
+              <a:t> ex.</a:t>
+            </a:r>
+          </a:p>
+          <a:p>
+            <a:pPr lvl="3"/>
+            <a:r>
+              <a:rPr lang="fr-CA" dirty="0"/>
+              <a:t> Première itération : </a:t>
+            </a:r>
+            <a:r>
+              <a:rPr lang="fr-CA" dirty="0">
+                <a:solidFill>
+                  <a:srgbClr val="FA4098"/>
+                </a:solidFill>
+              </a:rPr>
+              <a:t>donnee</a:t>
+            </a:r>
+            <a:r>
+              <a:rPr lang="fr-CA" dirty="0"/>
+              <a:t> vaut </a:t>
+            </a:r>
+            <a:r>
+              <a:rPr lang="fr-CA" dirty="0">
+                <a:solidFill>
+                  <a:srgbClr val="C00000"/>
+                </a:solidFill>
+              </a:rPr>
+              <a:t>"a"</a:t>
+            </a:r>
+            <a:r>
+              <a:rPr lang="fr-CA" dirty="0"/>
+              <a:t>.</a:t>
+            </a:r>
+          </a:p>
+          <a:p>
+            <a:pPr lvl="3"/>
+            <a:r>
+              <a:rPr lang="fr-CA" dirty="0"/>
+              <a:t> Deuxième itération : </a:t>
+            </a:r>
+            <a:r>
+              <a:rPr lang="fr-CA" dirty="0">
+                <a:solidFill>
+                  <a:srgbClr val="FA4098"/>
+                </a:solidFill>
+              </a:rPr>
+              <a:t>donnee</a:t>
+            </a:r>
+            <a:r>
+              <a:rPr lang="fr-CA" dirty="0"/>
+              <a:t> vaut </a:t>
+            </a:r>
+            <a:r>
+              <a:rPr lang="fr-CA" dirty="0">
+                <a:solidFill>
+                  <a:srgbClr val="C00000"/>
+                </a:solidFill>
+              </a:rPr>
+              <a:t>"b"</a:t>
+            </a:r>
+            <a:r>
+              <a:rPr lang="fr-CA" dirty="0"/>
+              <a:t>.</a:t>
+            </a:r>
+          </a:p>
+          <a:p>
+            <a:pPr lvl="3"/>
+            <a:r>
+              <a:rPr lang="fr-CA" dirty="0"/>
+              <a:t> Troisième itération : </a:t>
+            </a:r>
+            <a:r>
+              <a:rPr lang="fr-CA" dirty="0">
+                <a:solidFill>
+                  <a:srgbClr val="FA4098"/>
+                </a:solidFill>
+              </a:rPr>
+              <a:t>donnee</a:t>
+            </a:r>
+            <a:r>
+              <a:rPr lang="fr-CA" dirty="0"/>
+              <a:t> vaut </a:t>
+            </a:r>
+            <a:r>
+              <a:rPr lang="fr-CA" dirty="0">
+                <a:solidFill>
+                  <a:srgbClr val="C00000"/>
+                </a:solidFill>
+              </a:rPr>
+              <a:t>"c"</a:t>
+            </a:r>
+            <a:r>
+              <a:rPr lang="fr-CA" dirty="0"/>
+              <a:t>.</a:t>
+            </a:r>
+          </a:p>
+        </p:txBody>
+      </p:sp>
+      <p:sp>
+        <p:nvSpPr>
+          <p:cNvPr id="3" name="Titre 2">
+            <a:extLst>
+              <a:ext uri="{FF2B5EF4-FFF2-40B4-BE49-F238E27FC236}">
+                <a16:creationId xmlns:a16="http://schemas.microsoft.com/office/drawing/2014/main" id="{0D6EA1B8-984F-4384-8240-8CBD711239DD}"/>
+              </a:ext>
+            </a:extLst>
+          </p:cNvPr>
+          <p:cNvSpPr>
+            <a:spLocks noGrp="1"/>
+          </p:cNvSpPr>
+          <p:nvPr>
+            <p:ph type="title"/>
+          </p:nvPr>
+        </p:nvSpPr>
+        <p:spPr/>
+        <p:txBody>
+          <a:bodyPr/>
+          <a:lstStyle/>
+          <a:p>
+            <a:r>
+              <a:rPr lang="fr-CA" dirty="0"/>
+              <a:t>Boucles et tableaux</a:t>
+            </a:r>
+          </a:p>
+        </p:txBody>
+      </p:sp>
+      <p:pic>
+        <p:nvPicPr>
+          <p:cNvPr id="9" name="Image 8">
+            <a:extLst>
+              <a:ext uri="{FF2B5EF4-FFF2-40B4-BE49-F238E27FC236}">
+                <a16:creationId xmlns:a16="http://schemas.microsoft.com/office/drawing/2014/main" id="{680913DA-1D73-403E-9884-52CAAA416413}"/>
+              </a:ext>
+            </a:extLst>
+          </p:cNvPr>
+          <p:cNvPicPr>
+            <a:picLocks noChangeAspect="1"/>
+          </p:cNvPicPr>
+          <p:nvPr/>
+        </p:nvPicPr>
+        <p:blipFill>
+          <a:blip r:embed="rId2"/>
+          <a:stretch>
+            <a:fillRect/>
+          </a:stretch>
+        </p:blipFill>
+        <p:spPr>
+          <a:xfrm>
+            <a:off x="4112723" y="1785278"/>
+            <a:ext cx="3962953" cy="1038370"/>
+          </a:xfrm>
+          <a:prstGeom prst="rect">
+            <a:avLst/>
+          </a:prstGeom>
+          <a:ln w="28575">
+            <a:solidFill>
+              <a:srgbClr val="7385D1"/>
+            </a:solidFill>
+          </a:ln>
+        </p:spPr>
+      </p:pic>
+      <p:pic>
+        <p:nvPicPr>
+          <p:cNvPr id="5" name="Image 4">
+            <a:extLst>
+              <a:ext uri="{FF2B5EF4-FFF2-40B4-BE49-F238E27FC236}">
+                <a16:creationId xmlns:a16="http://schemas.microsoft.com/office/drawing/2014/main" id="{B66C5352-FBC9-48C3-B892-497D18DB38D8}"/>
+              </a:ext>
+            </a:extLst>
+          </p:cNvPr>
+          <p:cNvPicPr>
+            <a:picLocks noChangeAspect="1"/>
+          </p:cNvPicPr>
+          <p:nvPr/>
+        </p:nvPicPr>
+        <p:blipFill>
+          <a:blip r:embed="rId3"/>
+          <a:stretch>
+            <a:fillRect/>
+          </a:stretch>
+        </p:blipFill>
+        <p:spPr>
+          <a:xfrm>
+            <a:off x="2462093" y="3476642"/>
+            <a:ext cx="4439270" cy="476316"/>
+          </a:xfrm>
+          <a:prstGeom prst="rect">
+            <a:avLst/>
+          </a:prstGeom>
+        </p:spPr>
+      </p:pic>
+    </p:spTree>
+    <p:extLst>
+      <p:ext uri="{BB962C8B-B14F-4D97-AF65-F5344CB8AC3E}">
+        <p14:creationId xmlns:p14="http://schemas.microsoft.com/office/powerpoint/2010/main" val="3391325725"/>
+      </p:ext>
+    </p:extLst>
+  </p:cSld>
+  <p:clrMapOvr>
+    <a:masterClrMapping/>
+  </p:clrMapOvr>
+</p:sld>
+</file>
+
+<file path=ppt/slides/slide19.xml><?xml version="1.0" encoding="utf-8"?>
+<p:sld xmlns:a="http://schemas.openxmlformats.org/drawingml/2006/main" xmlns:r="http://schemas.openxmlformats.org/officeDocument/2006/relationships" xmlns:p="http://schemas.openxmlformats.org/presentationml/2006/main">
+  <p:cSld>
+    <p:spTree>
+      <p:nvGrpSpPr>
+        <p:cNvPr id="1" name=""/>
+        <p:cNvGrpSpPr/>
+        <p:nvPr/>
+      </p:nvGrpSpPr>
+      <p:grpSpPr>
+        <a:xfrm>
+          <a:off x="0" y="0"/>
+          <a:ext cx="0" cy="0"/>
+          <a:chOff x="0" y="0"/>
+          <a:chExt cx="0" cy="0"/>
+        </a:xfrm>
+      </p:grpSpPr>
+      <p:sp>
+        <p:nvSpPr>
+          <p:cNvPr id="2" name="Espace réservé du contenu 1">
+            <a:extLst>
+              <a:ext uri="{FF2B5EF4-FFF2-40B4-BE49-F238E27FC236}">
+                <a16:creationId xmlns:a16="http://schemas.microsoft.com/office/drawing/2014/main" id="{16BA42F2-30AC-47F9-9BC8-81B4CF62852A}"/>
+              </a:ext>
+            </a:extLst>
+          </p:cNvPr>
+          <p:cNvSpPr>
+            <a:spLocks noGrp="1"/>
+          </p:cNvSpPr>
+          <p:nvPr>
+            <p:ph idx="1"/>
+          </p:nvPr>
+        </p:nvSpPr>
+        <p:spPr/>
+        <p:txBody>
+          <a:bodyPr/>
+          <a:lstStyle/>
+          <a:p>
+            <a:r>
+              <a:rPr lang="fr-CA" dirty="0"/>
+              <a:t> Exemple 1</a:t>
+            </a:r>
+          </a:p>
+          <a:p>
+            <a:pPr lvl="1"/>
+            <a:r>
+              <a:rPr lang="fr-CA" dirty="0"/>
+              <a:t> Afficher toutes les données d’un tableau dans la console</a:t>
+            </a:r>
+          </a:p>
+          <a:p>
+            <a:pPr lvl="2"/>
+            <a:r>
+              <a:rPr lang="fr-CA" dirty="0"/>
+              <a:t> À chaque itération, on affiche la valeur de </a:t>
+            </a:r>
+            <a:r>
+              <a:rPr lang="fr-CA" dirty="0">
+                <a:solidFill>
+                  <a:srgbClr val="FA4098"/>
+                </a:solidFill>
+              </a:rPr>
+              <a:t>donnee</a:t>
+            </a:r>
+            <a:r>
+              <a:rPr lang="fr-CA" dirty="0"/>
+              <a:t> dans la </a:t>
+            </a:r>
+            <a:r>
+              <a:rPr lang="fr-CA" b="1" dirty="0"/>
+              <a:t>console</a:t>
+            </a:r>
+            <a:r>
+              <a:rPr lang="fr-CA" dirty="0"/>
+              <a:t>.</a:t>
+            </a:r>
+            <a:endParaRPr lang="fr-CA" b="1" dirty="0">
+              <a:solidFill>
+                <a:srgbClr val="FA4098"/>
+              </a:solidFill>
+            </a:endParaRPr>
+          </a:p>
+        </p:txBody>
+      </p:sp>
+      <p:sp>
+        <p:nvSpPr>
+          <p:cNvPr id="3" name="Titre 2">
+            <a:extLst>
+              <a:ext uri="{FF2B5EF4-FFF2-40B4-BE49-F238E27FC236}">
+                <a16:creationId xmlns:a16="http://schemas.microsoft.com/office/drawing/2014/main" id="{0D6EA1B8-984F-4384-8240-8CBD711239DD}"/>
+              </a:ext>
+            </a:extLst>
+          </p:cNvPr>
+          <p:cNvSpPr>
+            <a:spLocks noGrp="1"/>
+          </p:cNvSpPr>
+          <p:nvPr>
+            <p:ph type="title"/>
+          </p:nvPr>
+        </p:nvSpPr>
+        <p:spPr/>
+        <p:txBody>
+          <a:bodyPr/>
+          <a:lstStyle/>
+          <a:p>
+            <a:r>
+              <a:rPr lang="fr-CA" dirty="0"/>
+              <a:t>Boucles et tableaux</a:t>
+            </a:r>
+          </a:p>
+        </p:txBody>
+      </p:sp>
+      <p:pic>
+        <p:nvPicPr>
+          <p:cNvPr id="8" name="Image 7">
+            <a:extLst>
+              <a:ext uri="{FF2B5EF4-FFF2-40B4-BE49-F238E27FC236}">
+                <a16:creationId xmlns:a16="http://schemas.microsoft.com/office/drawing/2014/main" id="{02A9A4EF-7B36-45B4-9AE5-94D20E933514}"/>
+              </a:ext>
+            </a:extLst>
+          </p:cNvPr>
+          <p:cNvPicPr>
+            <a:picLocks noChangeAspect="1"/>
+          </p:cNvPicPr>
+          <p:nvPr/>
+        </p:nvPicPr>
+        <p:blipFill>
+          <a:blip r:embed="rId2"/>
+          <a:stretch>
+            <a:fillRect/>
+          </a:stretch>
+        </p:blipFill>
+        <p:spPr>
+          <a:xfrm>
+            <a:off x="1217267" y="2834438"/>
+            <a:ext cx="5390798" cy="2660394"/>
+          </a:xfrm>
+          <a:prstGeom prst="rect">
+            <a:avLst/>
+          </a:prstGeom>
+          <a:ln w="28575">
+            <a:solidFill>
+              <a:srgbClr val="7385D1"/>
+            </a:solidFill>
+          </a:ln>
+        </p:spPr>
+      </p:pic>
+      <p:pic>
+        <p:nvPicPr>
+          <p:cNvPr id="10" name="Image 9">
+            <a:extLst>
+              <a:ext uri="{FF2B5EF4-FFF2-40B4-BE49-F238E27FC236}">
+                <a16:creationId xmlns:a16="http://schemas.microsoft.com/office/drawing/2014/main" id="{2C174B40-4BB9-4742-AAF4-2C749DCF89E4}"/>
+              </a:ext>
+            </a:extLst>
+          </p:cNvPr>
+          <p:cNvPicPr>
+            <a:picLocks noChangeAspect="1"/>
+          </p:cNvPicPr>
+          <p:nvPr/>
+        </p:nvPicPr>
+        <p:blipFill>
+          <a:blip r:embed="rId3"/>
+          <a:stretch>
+            <a:fillRect/>
+          </a:stretch>
+        </p:blipFill>
+        <p:spPr>
+          <a:xfrm>
+            <a:off x="7637290" y="2834438"/>
+            <a:ext cx="2987698" cy="2660394"/>
+          </a:xfrm>
+          <a:prstGeom prst="rect">
+            <a:avLst/>
+          </a:prstGeom>
+          <a:ln w="28575">
+            <a:solidFill>
+              <a:srgbClr val="7385D1"/>
+            </a:solidFill>
+          </a:ln>
+        </p:spPr>
+      </p:pic>
+      <p:sp>
+        <p:nvSpPr>
+          <p:cNvPr id="11" name="Flèche : droite 10">
+            <a:extLst>
+              <a:ext uri="{FF2B5EF4-FFF2-40B4-BE49-F238E27FC236}">
+                <a16:creationId xmlns:a16="http://schemas.microsoft.com/office/drawing/2014/main" id="{EC6A70C8-677C-45DD-9D67-DFC6BC2C400D}"/>
+              </a:ext>
+            </a:extLst>
+          </p:cNvPr>
+          <p:cNvSpPr/>
+          <p:nvPr/>
+        </p:nvSpPr>
+        <p:spPr>
+          <a:xfrm>
+            <a:off x="6790445" y="3878123"/>
+            <a:ext cx="664464" cy="573024"/>
+          </a:xfrm>
+          <a:prstGeom prst="rightArrow">
+            <a:avLst/>
+          </a:prstGeom>
+          <a:solidFill>
+            <a:srgbClr val="7385D1"/>
+          </a:solidFill>
+          <a:ln>
+            <a:noFill/>
+          </a:ln>
+        </p:spPr>
+        <p:style>
+          <a:lnRef idx="2">
+            <a:schemeClr val="accent1">
+              <a:shade val="50000"/>
+            </a:schemeClr>
+          </a:lnRef>
+          <a:fillRef idx="1">
+            <a:schemeClr val="accent1"/>
+          </a:fillRef>
+          <a:effectRef idx="0">
+            <a:schemeClr val="accent1"/>
+          </a:effectRef>
+          <a:fontRef idx="minor">
+            <a:schemeClr val="lt1"/>
+          </a:fontRef>
+        </p:style>
+        <p:txBody>
+          <a:bodyPr rtlCol="0" anchor="ctr"/>
+          <a:lstStyle/>
+          <a:p>
+            <a:pPr algn="ctr"/>
+            <a:endParaRPr lang="fr-CA" dirty="0"/>
+          </a:p>
+        </p:txBody>
+      </p:sp>
+    </p:spTree>
+    <p:extLst>
+      <p:ext uri="{BB962C8B-B14F-4D97-AF65-F5344CB8AC3E}">
+        <p14:creationId xmlns:p14="http://schemas.microsoft.com/office/powerpoint/2010/main" val="1803649524"/>
       </p:ext>
     </p:extLst>
   </p:cSld>
@@ -7935,1058 +6577,6 @@
             <p:ph idx="1"/>
           </p:nvPr>
         </p:nvSpPr>
-        <p:spPr/>
-        <p:txBody>
-          <a:bodyPr/>
-          <a:lstStyle/>
-          <a:p>
-            <a:r>
-              <a:rPr lang="fr-CA" dirty="0"/>
-              <a:t> </a:t>
-            </a:r>
-            <a:r>
-              <a:rPr lang="fr-CA" b="1" dirty="0"/>
-              <a:t>Parcourir un </a:t>
-            </a:r>
-            <a:r>
-              <a:rPr lang="fr-CA" b="1" dirty="0">
-                <a:solidFill>
-                  <a:srgbClr val="FA4098"/>
-                </a:solidFill>
-              </a:rPr>
-              <a:t>tableau</a:t>
-            </a:r>
-            <a:r>
-              <a:rPr lang="fr-CA" b="1" dirty="0"/>
-              <a:t> </a:t>
-            </a:r>
-            <a:r>
-              <a:rPr lang="fr-CA" dirty="0"/>
-              <a:t>à l’aide d’une </a:t>
-            </a:r>
-            <a:r>
-              <a:rPr lang="fr-CA" b="1" dirty="0">
-                <a:solidFill>
-                  <a:srgbClr val="FA4098"/>
-                </a:solidFill>
-              </a:rPr>
-              <a:t>boucle</a:t>
-            </a:r>
-          </a:p>
-          <a:p>
-            <a:pPr lvl="1"/>
-            <a:r>
-              <a:rPr lang="fr-CA" dirty="0"/>
-              <a:t> Dans de nombreuses situations, il faut </a:t>
-            </a:r>
-            <a:r>
-              <a:rPr lang="fr-CA" b="1" dirty="0"/>
-              <a:t>parcourir un tableau en entier</a:t>
-            </a:r>
-            <a:r>
-              <a:rPr lang="fr-CA" dirty="0"/>
-              <a:t>...</a:t>
-            </a:r>
-          </a:p>
-          <a:p>
-            <a:pPr lvl="2"/>
-            <a:r>
-              <a:rPr lang="fr-CA" sz="1800" dirty="0"/>
-              <a:t> Afficher tous les éléments</a:t>
-            </a:r>
-          </a:p>
-          <a:p>
-            <a:pPr lvl="2"/>
-            <a:r>
-              <a:rPr lang="fr-CA" sz="1800" dirty="0"/>
-              <a:t> Calculer la somme ou la moyenne</a:t>
-            </a:r>
-          </a:p>
-          <a:p>
-            <a:pPr lvl="2"/>
-            <a:r>
-              <a:rPr lang="fr-CA" sz="1800" dirty="0"/>
-              <a:t> Trouver le maximum / minimum</a:t>
-            </a:r>
-          </a:p>
-          <a:p>
-            <a:pPr lvl="2"/>
-            <a:r>
-              <a:rPr lang="fr-CA" sz="1800" dirty="0"/>
-              <a:t> Trier les éléments par ordre croissant / alphabétique</a:t>
-            </a:r>
-          </a:p>
-          <a:p>
-            <a:pPr lvl="2"/>
-            <a:r>
-              <a:rPr lang="fr-CA" sz="1800" dirty="0"/>
-              <a:t> etc.</a:t>
-            </a:r>
-          </a:p>
-          <a:p>
-            <a:pPr lvl="2"/>
-            <a:endParaRPr lang="fr-CA" dirty="0"/>
-          </a:p>
-          <a:p>
-            <a:pPr lvl="1"/>
-            <a:r>
-              <a:rPr lang="fr-CA" dirty="0"/>
-              <a:t> Une </a:t>
-            </a:r>
-            <a:r>
-              <a:rPr lang="fr-CA" b="1" dirty="0">
-                <a:solidFill>
-                  <a:srgbClr val="FA4098"/>
-                </a:solidFill>
-              </a:rPr>
-              <a:t>boucle</a:t>
-            </a:r>
-            <a:r>
-              <a:rPr lang="fr-CA" dirty="0"/>
-              <a:t> qui sert à parcourir un </a:t>
-            </a:r>
-            <a:r>
-              <a:rPr lang="fr-CA" b="1" dirty="0">
-                <a:solidFill>
-                  <a:srgbClr val="FA4098"/>
-                </a:solidFill>
-              </a:rPr>
-              <a:t>tableau</a:t>
-            </a:r>
-            <a:r>
-              <a:rPr lang="fr-CA" dirty="0"/>
-              <a:t> ressemblera toujours à ceci</a:t>
-            </a:r>
-          </a:p>
-          <a:p>
-            <a:pPr lvl="2"/>
-            <a:r>
-              <a:rPr lang="fr-CA" dirty="0"/>
-              <a:t> Ça ressemble à une boucle </a:t>
-            </a:r>
-            <a:r>
-              <a:rPr lang="fr-CA" dirty="0">
-                <a:solidFill>
-                  <a:srgbClr val="FA4098"/>
-                </a:solidFill>
-              </a:rPr>
-              <a:t>for</a:t>
-            </a:r>
-            <a:r>
-              <a:rPr lang="fr-CA" dirty="0"/>
-              <a:t>, mais c’est un autre format adapté aux tableaux.</a:t>
-            </a:r>
-          </a:p>
-        </p:txBody>
-      </p:sp>
-      <p:sp>
-        <p:nvSpPr>
-          <p:cNvPr id="3" name="Titre 2">
-            <a:extLst>
-              <a:ext uri="{FF2B5EF4-FFF2-40B4-BE49-F238E27FC236}">
-                <a16:creationId xmlns:a16="http://schemas.microsoft.com/office/drawing/2014/main" id="{0D6EA1B8-984F-4384-8240-8CBD711239DD}"/>
-              </a:ext>
-            </a:extLst>
-          </p:cNvPr>
-          <p:cNvSpPr>
-            <a:spLocks noGrp="1"/>
-          </p:cNvSpPr>
-          <p:nvPr>
-            <p:ph type="title"/>
-          </p:nvPr>
-        </p:nvSpPr>
-        <p:spPr/>
-        <p:txBody>
-          <a:bodyPr/>
-          <a:lstStyle/>
-          <a:p>
-            <a:r>
-              <a:rPr lang="fr-CA" dirty="0"/>
-              <a:t>Boucles et tableaux</a:t>
-            </a:r>
-          </a:p>
-        </p:txBody>
-      </p:sp>
-      <p:pic>
-        <p:nvPicPr>
-          <p:cNvPr id="9" name="Image 8">
-            <a:extLst>
-              <a:ext uri="{FF2B5EF4-FFF2-40B4-BE49-F238E27FC236}">
-                <a16:creationId xmlns:a16="http://schemas.microsoft.com/office/drawing/2014/main" id="{680913DA-1D73-403E-9884-52CAAA416413}"/>
-              </a:ext>
-            </a:extLst>
-          </p:cNvPr>
-          <p:cNvPicPr>
-            <a:picLocks noChangeAspect="1"/>
-          </p:cNvPicPr>
-          <p:nvPr/>
-        </p:nvPicPr>
-        <p:blipFill>
-          <a:blip r:embed="rId2"/>
-          <a:stretch>
-            <a:fillRect/>
-          </a:stretch>
-        </p:blipFill>
-        <p:spPr>
-          <a:xfrm>
-            <a:off x="4112723" y="5558702"/>
-            <a:ext cx="3962953" cy="1038370"/>
-          </a:xfrm>
-          <a:prstGeom prst="rect">
-            <a:avLst/>
-          </a:prstGeom>
-          <a:ln w="28575">
-            <a:solidFill>
-              <a:srgbClr val="7385D1"/>
-            </a:solidFill>
-          </a:ln>
-        </p:spPr>
-      </p:pic>
-      <p:sp>
-        <p:nvSpPr>
-          <p:cNvPr id="10" name="ZoneTexte 9">
-            <a:extLst>
-              <a:ext uri="{FF2B5EF4-FFF2-40B4-BE49-F238E27FC236}">
-                <a16:creationId xmlns:a16="http://schemas.microsoft.com/office/drawing/2014/main" id="{5192B0B1-5CF0-442B-96E1-10FCFE60F06E}"/>
-              </a:ext>
-            </a:extLst>
-          </p:cNvPr>
-          <p:cNvSpPr txBox="1"/>
-          <p:nvPr/>
-        </p:nvSpPr>
-        <p:spPr>
-          <a:xfrm>
-            <a:off x="6933372" y="4630763"/>
-            <a:ext cx="4783140" cy="646331"/>
-          </a:xfrm>
-          <a:prstGeom prst="rect">
-            <a:avLst/>
-          </a:prstGeom>
-          <a:solidFill>
-            <a:srgbClr val="7385D1">
-              <a:alpha val="20000"/>
-            </a:srgbClr>
-          </a:solidFill>
-        </p:spPr>
-        <p:txBody>
-          <a:bodyPr wrap="square" rtlCol="0">
-            <a:spAutoFit/>
-          </a:bodyPr>
-          <a:lstStyle/>
-          <a:p>
-            <a:r>
-              <a:rPr lang="fr-CA" dirty="0">
-                <a:solidFill>
-                  <a:srgbClr val="FA4098"/>
-                </a:solidFill>
-              </a:rPr>
-              <a:t>monTableau</a:t>
-            </a:r>
-            <a:r>
-              <a:rPr lang="fr-CA" dirty="0">
-                <a:solidFill>
-                  <a:srgbClr val="7385D1"/>
-                </a:solidFill>
-              </a:rPr>
-              <a:t> est une variable qui contient un tableau</a:t>
-            </a:r>
-          </a:p>
-        </p:txBody>
-      </p:sp>
-      <p:sp>
-        <p:nvSpPr>
-          <p:cNvPr id="14" name="ZoneTexte 13">
-            <a:extLst>
-              <a:ext uri="{FF2B5EF4-FFF2-40B4-BE49-F238E27FC236}">
-                <a16:creationId xmlns:a16="http://schemas.microsoft.com/office/drawing/2014/main" id="{04DCCE49-887B-4B2E-816A-B6FE40E4EBCE}"/>
-              </a:ext>
-            </a:extLst>
-          </p:cNvPr>
-          <p:cNvSpPr txBox="1"/>
-          <p:nvPr/>
-        </p:nvSpPr>
-        <p:spPr>
-          <a:xfrm>
-            <a:off x="1018584" y="4769263"/>
-            <a:ext cx="5662631" cy="369332"/>
-          </a:xfrm>
-          <a:prstGeom prst="rect">
-            <a:avLst/>
-          </a:prstGeom>
-          <a:solidFill>
-            <a:srgbClr val="7385D1">
-              <a:alpha val="20000"/>
-            </a:srgbClr>
-          </a:solidFill>
-        </p:spPr>
-        <p:txBody>
-          <a:bodyPr wrap="square" rtlCol="0">
-            <a:spAutoFit/>
-          </a:bodyPr>
-          <a:lstStyle/>
-          <a:p>
-            <a:r>
-              <a:rPr lang="fr-CA" dirty="0">
-                <a:solidFill>
-                  <a:srgbClr val="FA4098"/>
-                </a:solidFill>
-              </a:rPr>
-              <a:t>donnee </a:t>
-            </a:r>
-            <a:r>
-              <a:rPr lang="fr-CA">
-                <a:solidFill>
-                  <a:srgbClr val="7385D1"/>
-                </a:solidFill>
-              </a:rPr>
-              <a:t>représente chacune des données du </a:t>
-            </a:r>
-            <a:r>
-              <a:rPr lang="fr-CA" dirty="0">
-                <a:solidFill>
-                  <a:srgbClr val="7385D1"/>
-                </a:solidFill>
-              </a:rPr>
-              <a:t>tableau</a:t>
-            </a:r>
-          </a:p>
-        </p:txBody>
-      </p:sp>
-      <p:cxnSp>
-        <p:nvCxnSpPr>
-          <p:cNvPr id="15" name="Connecteur droit avec flèche 14">
-            <a:extLst>
-              <a:ext uri="{FF2B5EF4-FFF2-40B4-BE49-F238E27FC236}">
-                <a16:creationId xmlns:a16="http://schemas.microsoft.com/office/drawing/2014/main" id="{121BF443-4EE0-434F-B68B-8151AAA3EFD6}"/>
-              </a:ext>
-            </a:extLst>
-          </p:cNvPr>
-          <p:cNvCxnSpPr>
-            <a:cxnSpLocks/>
-          </p:cNvCxnSpPr>
-          <p:nvPr/>
-        </p:nvCxnSpPr>
-        <p:spPr>
-          <a:xfrm flipH="1">
-            <a:off x="7229856" y="5225347"/>
-            <a:ext cx="225552" cy="431741"/>
-          </a:xfrm>
-          <a:prstGeom prst="straightConnector1">
-            <a:avLst/>
-          </a:prstGeom>
-          <a:ln w="57150">
-            <a:solidFill>
-              <a:srgbClr val="FA4098"/>
-            </a:solidFill>
-            <a:tailEnd type="triangle"/>
-          </a:ln>
-        </p:spPr>
-        <p:style>
-          <a:lnRef idx="1">
-            <a:schemeClr val="accent1"/>
-          </a:lnRef>
-          <a:fillRef idx="0">
-            <a:schemeClr val="accent1"/>
-          </a:fillRef>
-          <a:effectRef idx="0">
-            <a:schemeClr val="accent1"/>
-          </a:effectRef>
-          <a:fontRef idx="minor">
-            <a:schemeClr val="tx1"/>
-          </a:fontRef>
-        </p:style>
-      </p:cxnSp>
-      <p:cxnSp>
-        <p:nvCxnSpPr>
-          <p:cNvPr id="17" name="Connecteur droit avec flèche 16">
-            <a:extLst>
-              <a:ext uri="{FF2B5EF4-FFF2-40B4-BE49-F238E27FC236}">
-                <a16:creationId xmlns:a16="http://schemas.microsoft.com/office/drawing/2014/main" id="{80F7D9B2-0514-4CA0-AFBF-FABCD0FF0E0B}"/>
-              </a:ext>
-            </a:extLst>
-          </p:cNvPr>
-          <p:cNvCxnSpPr>
-            <a:cxnSpLocks/>
-          </p:cNvCxnSpPr>
-          <p:nvPr/>
-        </p:nvCxnSpPr>
-        <p:spPr>
-          <a:xfrm>
-            <a:off x="4669536" y="5133487"/>
-            <a:ext cx="741653" cy="535931"/>
-          </a:xfrm>
-          <a:prstGeom prst="straightConnector1">
-            <a:avLst/>
-          </a:prstGeom>
-          <a:ln w="57150">
-            <a:solidFill>
-              <a:srgbClr val="FA4098"/>
-            </a:solidFill>
-            <a:tailEnd type="triangle"/>
-          </a:ln>
-        </p:spPr>
-        <p:style>
-          <a:lnRef idx="1">
-            <a:schemeClr val="accent1"/>
-          </a:lnRef>
-          <a:fillRef idx="0">
-            <a:schemeClr val="accent1"/>
-          </a:fillRef>
-          <a:effectRef idx="0">
-            <a:schemeClr val="accent1"/>
-          </a:effectRef>
-          <a:fontRef idx="minor">
-            <a:schemeClr val="tx1"/>
-          </a:fontRef>
-        </p:style>
-      </p:cxnSp>
-    </p:spTree>
-    <p:extLst>
-      <p:ext uri="{BB962C8B-B14F-4D97-AF65-F5344CB8AC3E}">
-        <p14:creationId xmlns:p14="http://schemas.microsoft.com/office/powerpoint/2010/main" val="2937155545"/>
-      </p:ext>
-    </p:extLst>
-  </p:cSld>
-  <p:clrMapOvr>
-    <a:masterClrMapping/>
-  </p:clrMapOvr>
-</p:sld>
-</file>
-
-<file path=ppt/slides/slide21.xml><?xml version="1.0" encoding="utf-8"?>
-<p:sld xmlns:a="http://schemas.openxmlformats.org/drawingml/2006/main" xmlns:r="http://schemas.openxmlformats.org/officeDocument/2006/relationships" xmlns:p="http://schemas.openxmlformats.org/presentationml/2006/main">
-  <p:cSld>
-    <p:spTree>
-      <p:nvGrpSpPr>
-        <p:cNvPr id="1" name=""/>
-        <p:cNvGrpSpPr/>
-        <p:nvPr/>
-      </p:nvGrpSpPr>
-      <p:grpSpPr>
-        <a:xfrm>
-          <a:off x="0" y="0"/>
-          <a:ext cx="0" cy="0"/>
-          <a:chOff x="0" y="0"/>
-          <a:chExt cx="0" cy="0"/>
-        </a:xfrm>
-      </p:grpSpPr>
-      <p:sp>
-        <p:nvSpPr>
-          <p:cNvPr id="2" name="Espace réservé du contenu 1">
-            <a:extLst>
-              <a:ext uri="{FF2B5EF4-FFF2-40B4-BE49-F238E27FC236}">
-                <a16:creationId xmlns:a16="http://schemas.microsoft.com/office/drawing/2014/main" id="{16BA42F2-30AC-47F9-9BC8-81B4CF62852A}"/>
-              </a:ext>
-            </a:extLst>
-          </p:cNvPr>
-          <p:cNvSpPr>
-            <a:spLocks noGrp="1"/>
-          </p:cNvSpPr>
-          <p:nvPr>
-            <p:ph idx="1"/>
-          </p:nvPr>
-        </p:nvSpPr>
-        <p:spPr>
-          <a:xfrm>
-            <a:off x="838200" y="1150572"/>
-            <a:ext cx="10512000" cy="5640372"/>
-          </a:xfrm>
-        </p:spPr>
-        <p:txBody>
-          <a:bodyPr/>
-          <a:lstStyle/>
-          <a:p>
-            <a:r>
-              <a:rPr lang="fr-CA" dirty="0"/>
-              <a:t> </a:t>
-            </a:r>
-            <a:r>
-              <a:rPr lang="fr-CA" b="1" dirty="0"/>
-              <a:t>Parcourir un </a:t>
-            </a:r>
-            <a:r>
-              <a:rPr lang="fr-CA" b="1" dirty="0">
-                <a:solidFill>
-                  <a:srgbClr val="FA4098"/>
-                </a:solidFill>
-              </a:rPr>
-              <a:t>tableau</a:t>
-            </a:r>
-            <a:r>
-              <a:rPr lang="fr-CA" b="1" dirty="0"/>
-              <a:t> </a:t>
-            </a:r>
-            <a:r>
-              <a:rPr lang="fr-CA" dirty="0"/>
-              <a:t>à l’aide d’une </a:t>
-            </a:r>
-            <a:r>
-              <a:rPr lang="fr-CA" b="1" dirty="0">
-                <a:solidFill>
-                  <a:srgbClr val="FA4098"/>
-                </a:solidFill>
-              </a:rPr>
-              <a:t>boucle</a:t>
-            </a:r>
-          </a:p>
-          <a:p>
-            <a:endParaRPr lang="fr-CA" b="1" dirty="0">
-              <a:solidFill>
-                <a:srgbClr val="FA4098"/>
-              </a:solidFill>
-            </a:endParaRPr>
-          </a:p>
-          <a:p>
-            <a:endParaRPr lang="fr-CA" b="1" dirty="0">
-              <a:solidFill>
-                <a:srgbClr val="FA4098"/>
-              </a:solidFill>
-            </a:endParaRPr>
-          </a:p>
-          <a:p>
-            <a:endParaRPr lang="fr-CA" b="1" dirty="0">
-              <a:solidFill>
-                <a:srgbClr val="FA4098"/>
-              </a:solidFill>
-            </a:endParaRPr>
-          </a:p>
-          <a:p>
-            <a:pPr lvl="1"/>
-            <a:r>
-              <a:rPr lang="fr-CA" dirty="0"/>
-              <a:t> </a:t>
-            </a:r>
-            <a:r>
-              <a:rPr lang="fr-CA" dirty="0">
-                <a:solidFill>
-                  <a:srgbClr val="FA4098"/>
-                </a:solidFill>
-              </a:rPr>
-              <a:t>monTableau</a:t>
-            </a:r>
-            <a:r>
-              <a:rPr lang="fr-CA" dirty="0"/>
-              <a:t> est le nom de la variable qui contient un tableau.</a:t>
-            </a:r>
-          </a:p>
-          <a:p>
-            <a:pPr lvl="2"/>
-            <a:r>
-              <a:rPr lang="fr-CA" dirty="0"/>
-              <a:t> ex.</a:t>
-            </a:r>
-          </a:p>
-          <a:p>
-            <a:pPr lvl="2"/>
-            <a:endParaRPr lang="fr-CA" dirty="0"/>
-          </a:p>
-          <a:p>
-            <a:pPr lvl="1"/>
-            <a:r>
-              <a:rPr lang="fr-CA" dirty="0"/>
-              <a:t> </a:t>
-            </a:r>
-            <a:r>
-              <a:rPr lang="fr-CA" dirty="0">
-                <a:solidFill>
-                  <a:srgbClr val="FA4098"/>
-                </a:solidFill>
-              </a:rPr>
-              <a:t>donnee</a:t>
-            </a:r>
-            <a:r>
-              <a:rPr lang="fr-CA" dirty="0"/>
-              <a:t> est une variable locale spéciale qui représente chaque donnée du tableau, une à la fois, à travers les itérations.</a:t>
-            </a:r>
-          </a:p>
-          <a:p>
-            <a:pPr lvl="2"/>
-            <a:r>
-              <a:rPr lang="fr-CA" dirty="0"/>
-              <a:t> ex.</a:t>
-            </a:r>
-          </a:p>
-          <a:p>
-            <a:pPr lvl="3"/>
-            <a:r>
-              <a:rPr lang="fr-CA" dirty="0"/>
-              <a:t> Première itération : </a:t>
-            </a:r>
-            <a:r>
-              <a:rPr lang="fr-CA" dirty="0">
-                <a:solidFill>
-                  <a:srgbClr val="FA4098"/>
-                </a:solidFill>
-              </a:rPr>
-              <a:t>donnee</a:t>
-            </a:r>
-            <a:r>
-              <a:rPr lang="fr-CA" dirty="0"/>
-              <a:t> vaut </a:t>
-            </a:r>
-            <a:r>
-              <a:rPr lang="fr-CA" dirty="0">
-                <a:solidFill>
-                  <a:srgbClr val="C00000"/>
-                </a:solidFill>
-              </a:rPr>
-              <a:t>"a"</a:t>
-            </a:r>
-            <a:r>
-              <a:rPr lang="fr-CA" dirty="0"/>
-              <a:t>.</a:t>
-            </a:r>
-          </a:p>
-          <a:p>
-            <a:pPr lvl="3"/>
-            <a:r>
-              <a:rPr lang="fr-CA" dirty="0"/>
-              <a:t> Deuxième itération : </a:t>
-            </a:r>
-            <a:r>
-              <a:rPr lang="fr-CA" dirty="0">
-                <a:solidFill>
-                  <a:srgbClr val="FA4098"/>
-                </a:solidFill>
-              </a:rPr>
-              <a:t>donnee</a:t>
-            </a:r>
-            <a:r>
-              <a:rPr lang="fr-CA" dirty="0"/>
-              <a:t> vaut </a:t>
-            </a:r>
-            <a:r>
-              <a:rPr lang="fr-CA" dirty="0">
-                <a:solidFill>
-                  <a:srgbClr val="C00000"/>
-                </a:solidFill>
-              </a:rPr>
-              <a:t>"b"</a:t>
-            </a:r>
-            <a:r>
-              <a:rPr lang="fr-CA" dirty="0"/>
-              <a:t>.</a:t>
-            </a:r>
-          </a:p>
-          <a:p>
-            <a:pPr lvl="3"/>
-            <a:r>
-              <a:rPr lang="fr-CA" dirty="0"/>
-              <a:t> Troisième itération : </a:t>
-            </a:r>
-            <a:r>
-              <a:rPr lang="fr-CA" dirty="0">
-                <a:solidFill>
-                  <a:srgbClr val="FA4098"/>
-                </a:solidFill>
-              </a:rPr>
-              <a:t>donnee</a:t>
-            </a:r>
-            <a:r>
-              <a:rPr lang="fr-CA" dirty="0"/>
-              <a:t> vaut </a:t>
-            </a:r>
-            <a:r>
-              <a:rPr lang="fr-CA" dirty="0">
-                <a:solidFill>
-                  <a:srgbClr val="C00000"/>
-                </a:solidFill>
-              </a:rPr>
-              <a:t>"c"</a:t>
-            </a:r>
-            <a:r>
-              <a:rPr lang="fr-CA" dirty="0"/>
-              <a:t>.</a:t>
-            </a:r>
-          </a:p>
-        </p:txBody>
-      </p:sp>
-      <p:sp>
-        <p:nvSpPr>
-          <p:cNvPr id="3" name="Titre 2">
-            <a:extLst>
-              <a:ext uri="{FF2B5EF4-FFF2-40B4-BE49-F238E27FC236}">
-                <a16:creationId xmlns:a16="http://schemas.microsoft.com/office/drawing/2014/main" id="{0D6EA1B8-984F-4384-8240-8CBD711239DD}"/>
-              </a:ext>
-            </a:extLst>
-          </p:cNvPr>
-          <p:cNvSpPr>
-            <a:spLocks noGrp="1"/>
-          </p:cNvSpPr>
-          <p:nvPr>
-            <p:ph type="title"/>
-          </p:nvPr>
-        </p:nvSpPr>
-        <p:spPr/>
-        <p:txBody>
-          <a:bodyPr/>
-          <a:lstStyle/>
-          <a:p>
-            <a:r>
-              <a:rPr lang="fr-CA" dirty="0"/>
-              <a:t>Boucles et tableaux</a:t>
-            </a:r>
-          </a:p>
-        </p:txBody>
-      </p:sp>
-      <p:pic>
-        <p:nvPicPr>
-          <p:cNvPr id="9" name="Image 8">
-            <a:extLst>
-              <a:ext uri="{FF2B5EF4-FFF2-40B4-BE49-F238E27FC236}">
-                <a16:creationId xmlns:a16="http://schemas.microsoft.com/office/drawing/2014/main" id="{680913DA-1D73-403E-9884-52CAAA416413}"/>
-              </a:ext>
-            </a:extLst>
-          </p:cNvPr>
-          <p:cNvPicPr>
-            <a:picLocks noChangeAspect="1"/>
-          </p:cNvPicPr>
-          <p:nvPr/>
-        </p:nvPicPr>
-        <p:blipFill>
-          <a:blip r:embed="rId2"/>
-          <a:stretch>
-            <a:fillRect/>
-          </a:stretch>
-        </p:blipFill>
-        <p:spPr>
-          <a:xfrm>
-            <a:off x="4112723" y="1785278"/>
-            <a:ext cx="3962953" cy="1038370"/>
-          </a:xfrm>
-          <a:prstGeom prst="rect">
-            <a:avLst/>
-          </a:prstGeom>
-          <a:ln w="28575">
-            <a:solidFill>
-              <a:srgbClr val="7385D1"/>
-            </a:solidFill>
-          </a:ln>
-        </p:spPr>
-      </p:pic>
-      <p:pic>
-        <p:nvPicPr>
-          <p:cNvPr id="5" name="Image 4">
-            <a:extLst>
-              <a:ext uri="{FF2B5EF4-FFF2-40B4-BE49-F238E27FC236}">
-                <a16:creationId xmlns:a16="http://schemas.microsoft.com/office/drawing/2014/main" id="{B66C5352-FBC9-48C3-B892-497D18DB38D8}"/>
-              </a:ext>
-            </a:extLst>
-          </p:cNvPr>
-          <p:cNvPicPr>
-            <a:picLocks noChangeAspect="1"/>
-          </p:cNvPicPr>
-          <p:nvPr/>
-        </p:nvPicPr>
-        <p:blipFill>
-          <a:blip r:embed="rId3"/>
-          <a:stretch>
-            <a:fillRect/>
-          </a:stretch>
-        </p:blipFill>
-        <p:spPr>
-          <a:xfrm>
-            <a:off x="2462093" y="3476642"/>
-            <a:ext cx="4439270" cy="476316"/>
-          </a:xfrm>
-          <a:prstGeom prst="rect">
-            <a:avLst/>
-          </a:prstGeom>
-        </p:spPr>
-      </p:pic>
-    </p:spTree>
-    <p:extLst>
-      <p:ext uri="{BB962C8B-B14F-4D97-AF65-F5344CB8AC3E}">
-        <p14:creationId xmlns:p14="http://schemas.microsoft.com/office/powerpoint/2010/main" val="3391325725"/>
-      </p:ext>
-    </p:extLst>
-  </p:cSld>
-  <p:clrMapOvr>
-    <a:masterClrMapping/>
-  </p:clrMapOvr>
-</p:sld>
-</file>
-
-<file path=ppt/slides/slide22.xml><?xml version="1.0" encoding="utf-8"?>
-<p:sld xmlns:a="http://schemas.openxmlformats.org/drawingml/2006/main" xmlns:r="http://schemas.openxmlformats.org/officeDocument/2006/relationships" xmlns:p="http://schemas.openxmlformats.org/presentationml/2006/main">
-  <p:cSld>
-    <p:spTree>
-      <p:nvGrpSpPr>
-        <p:cNvPr id="1" name=""/>
-        <p:cNvGrpSpPr/>
-        <p:nvPr/>
-      </p:nvGrpSpPr>
-      <p:grpSpPr>
-        <a:xfrm>
-          <a:off x="0" y="0"/>
-          <a:ext cx="0" cy="0"/>
-          <a:chOff x="0" y="0"/>
-          <a:chExt cx="0" cy="0"/>
-        </a:xfrm>
-      </p:grpSpPr>
-      <p:sp>
-        <p:nvSpPr>
-          <p:cNvPr id="2" name="Espace réservé du contenu 1">
-            <a:extLst>
-              <a:ext uri="{FF2B5EF4-FFF2-40B4-BE49-F238E27FC236}">
-                <a16:creationId xmlns:a16="http://schemas.microsoft.com/office/drawing/2014/main" id="{16BA42F2-30AC-47F9-9BC8-81B4CF62852A}"/>
-              </a:ext>
-            </a:extLst>
-          </p:cNvPr>
-          <p:cNvSpPr>
-            <a:spLocks noGrp="1"/>
-          </p:cNvSpPr>
-          <p:nvPr>
-            <p:ph idx="1"/>
-          </p:nvPr>
-        </p:nvSpPr>
-        <p:spPr/>
-        <p:txBody>
-          <a:bodyPr/>
-          <a:lstStyle/>
-          <a:p>
-            <a:r>
-              <a:rPr lang="fr-CA" dirty="0"/>
-              <a:t> Exemple 1</a:t>
-            </a:r>
-          </a:p>
-          <a:p>
-            <a:pPr lvl="1"/>
-            <a:r>
-              <a:rPr lang="fr-CA" dirty="0"/>
-              <a:t> Afficher toutes les données d’un tableau dans la console</a:t>
-            </a:r>
-          </a:p>
-          <a:p>
-            <a:pPr lvl="2"/>
-            <a:r>
-              <a:rPr lang="fr-CA" dirty="0"/>
-              <a:t> À chaque itération, on affiche la valeur de </a:t>
-            </a:r>
-            <a:r>
-              <a:rPr lang="fr-CA" dirty="0">
-                <a:solidFill>
-                  <a:srgbClr val="FA4098"/>
-                </a:solidFill>
-              </a:rPr>
-              <a:t>donnee</a:t>
-            </a:r>
-            <a:r>
-              <a:rPr lang="fr-CA" dirty="0"/>
-              <a:t> dans la </a:t>
-            </a:r>
-            <a:r>
-              <a:rPr lang="fr-CA" b="1" dirty="0"/>
-              <a:t>console</a:t>
-            </a:r>
-            <a:r>
-              <a:rPr lang="fr-CA" dirty="0"/>
-              <a:t>.</a:t>
-            </a:r>
-            <a:endParaRPr lang="fr-CA" b="1" dirty="0">
-              <a:solidFill>
-                <a:srgbClr val="FA4098"/>
-              </a:solidFill>
-            </a:endParaRPr>
-          </a:p>
-        </p:txBody>
-      </p:sp>
-      <p:sp>
-        <p:nvSpPr>
-          <p:cNvPr id="3" name="Titre 2">
-            <a:extLst>
-              <a:ext uri="{FF2B5EF4-FFF2-40B4-BE49-F238E27FC236}">
-                <a16:creationId xmlns:a16="http://schemas.microsoft.com/office/drawing/2014/main" id="{0D6EA1B8-984F-4384-8240-8CBD711239DD}"/>
-              </a:ext>
-            </a:extLst>
-          </p:cNvPr>
-          <p:cNvSpPr>
-            <a:spLocks noGrp="1"/>
-          </p:cNvSpPr>
-          <p:nvPr>
-            <p:ph type="title"/>
-          </p:nvPr>
-        </p:nvSpPr>
-        <p:spPr/>
-        <p:txBody>
-          <a:bodyPr/>
-          <a:lstStyle/>
-          <a:p>
-            <a:r>
-              <a:rPr lang="fr-CA" dirty="0"/>
-              <a:t>Boucles et tableaux</a:t>
-            </a:r>
-          </a:p>
-        </p:txBody>
-      </p:sp>
-      <p:pic>
-        <p:nvPicPr>
-          <p:cNvPr id="8" name="Image 7">
-            <a:extLst>
-              <a:ext uri="{FF2B5EF4-FFF2-40B4-BE49-F238E27FC236}">
-                <a16:creationId xmlns:a16="http://schemas.microsoft.com/office/drawing/2014/main" id="{02A9A4EF-7B36-45B4-9AE5-94D20E933514}"/>
-              </a:ext>
-            </a:extLst>
-          </p:cNvPr>
-          <p:cNvPicPr>
-            <a:picLocks noChangeAspect="1"/>
-          </p:cNvPicPr>
-          <p:nvPr/>
-        </p:nvPicPr>
-        <p:blipFill>
-          <a:blip r:embed="rId2"/>
-          <a:stretch>
-            <a:fillRect/>
-          </a:stretch>
-        </p:blipFill>
-        <p:spPr>
-          <a:xfrm>
-            <a:off x="1217267" y="2834438"/>
-            <a:ext cx="5390798" cy="2660394"/>
-          </a:xfrm>
-          <a:prstGeom prst="rect">
-            <a:avLst/>
-          </a:prstGeom>
-          <a:ln w="28575">
-            <a:solidFill>
-              <a:srgbClr val="7385D1"/>
-            </a:solidFill>
-          </a:ln>
-        </p:spPr>
-      </p:pic>
-      <p:pic>
-        <p:nvPicPr>
-          <p:cNvPr id="10" name="Image 9">
-            <a:extLst>
-              <a:ext uri="{FF2B5EF4-FFF2-40B4-BE49-F238E27FC236}">
-                <a16:creationId xmlns:a16="http://schemas.microsoft.com/office/drawing/2014/main" id="{2C174B40-4BB9-4742-AAF4-2C749DCF89E4}"/>
-              </a:ext>
-            </a:extLst>
-          </p:cNvPr>
-          <p:cNvPicPr>
-            <a:picLocks noChangeAspect="1"/>
-          </p:cNvPicPr>
-          <p:nvPr/>
-        </p:nvPicPr>
-        <p:blipFill>
-          <a:blip r:embed="rId3"/>
-          <a:stretch>
-            <a:fillRect/>
-          </a:stretch>
-        </p:blipFill>
-        <p:spPr>
-          <a:xfrm>
-            <a:off x="7637290" y="2834438"/>
-            <a:ext cx="2987698" cy="2660394"/>
-          </a:xfrm>
-          <a:prstGeom prst="rect">
-            <a:avLst/>
-          </a:prstGeom>
-          <a:ln w="28575">
-            <a:solidFill>
-              <a:srgbClr val="7385D1"/>
-            </a:solidFill>
-          </a:ln>
-        </p:spPr>
-      </p:pic>
-      <p:sp>
-        <p:nvSpPr>
-          <p:cNvPr id="11" name="Flèche : droite 10">
-            <a:extLst>
-              <a:ext uri="{FF2B5EF4-FFF2-40B4-BE49-F238E27FC236}">
-                <a16:creationId xmlns:a16="http://schemas.microsoft.com/office/drawing/2014/main" id="{EC6A70C8-677C-45DD-9D67-DFC6BC2C400D}"/>
-              </a:ext>
-            </a:extLst>
-          </p:cNvPr>
-          <p:cNvSpPr/>
-          <p:nvPr/>
-        </p:nvSpPr>
-        <p:spPr>
-          <a:xfrm>
-            <a:off x="6790445" y="3878123"/>
-            <a:ext cx="664464" cy="573024"/>
-          </a:xfrm>
-          <a:prstGeom prst="rightArrow">
-            <a:avLst/>
-          </a:prstGeom>
-          <a:solidFill>
-            <a:srgbClr val="7385D1"/>
-          </a:solidFill>
-          <a:ln>
-            <a:noFill/>
-          </a:ln>
-        </p:spPr>
-        <p:style>
-          <a:lnRef idx="2">
-            <a:schemeClr val="accent1">
-              <a:shade val="50000"/>
-            </a:schemeClr>
-          </a:lnRef>
-          <a:fillRef idx="1">
-            <a:schemeClr val="accent1"/>
-          </a:fillRef>
-          <a:effectRef idx="0">
-            <a:schemeClr val="accent1"/>
-          </a:effectRef>
-          <a:fontRef idx="minor">
-            <a:schemeClr val="lt1"/>
-          </a:fontRef>
-        </p:style>
-        <p:txBody>
-          <a:bodyPr rtlCol="0" anchor="ctr"/>
-          <a:lstStyle/>
-          <a:p>
-            <a:pPr algn="ctr"/>
-            <a:endParaRPr lang="fr-CA" dirty="0"/>
-          </a:p>
-        </p:txBody>
-      </p:sp>
-    </p:spTree>
-    <p:extLst>
-      <p:ext uri="{BB962C8B-B14F-4D97-AF65-F5344CB8AC3E}">
-        <p14:creationId xmlns:p14="http://schemas.microsoft.com/office/powerpoint/2010/main" val="1803649524"/>
-      </p:ext>
-    </p:extLst>
-  </p:cSld>
-  <p:clrMapOvr>
-    <a:masterClrMapping/>
-  </p:clrMapOvr>
-</p:sld>
-</file>
-
-<file path=ppt/slides/slide23.xml><?xml version="1.0" encoding="utf-8"?>
-<p:sld xmlns:a="http://schemas.openxmlformats.org/drawingml/2006/main" xmlns:r="http://schemas.openxmlformats.org/officeDocument/2006/relationships" xmlns:p="http://schemas.openxmlformats.org/presentationml/2006/main">
-  <p:cSld>
-    <p:spTree>
-      <p:nvGrpSpPr>
-        <p:cNvPr id="1" name=""/>
-        <p:cNvGrpSpPr/>
-        <p:nvPr/>
-      </p:nvGrpSpPr>
-      <p:grpSpPr>
-        <a:xfrm>
-          <a:off x="0" y="0"/>
-          <a:ext cx="0" cy="0"/>
-          <a:chOff x="0" y="0"/>
-          <a:chExt cx="0" cy="0"/>
-        </a:xfrm>
-      </p:grpSpPr>
-      <p:sp>
-        <p:nvSpPr>
-          <p:cNvPr id="2" name="Espace réservé du contenu 1">
-            <a:extLst>
-              <a:ext uri="{FF2B5EF4-FFF2-40B4-BE49-F238E27FC236}">
-                <a16:creationId xmlns:a16="http://schemas.microsoft.com/office/drawing/2014/main" id="{16BA42F2-30AC-47F9-9BC8-81B4CF62852A}"/>
-              </a:ext>
-            </a:extLst>
-          </p:cNvPr>
-          <p:cNvSpPr>
-            <a:spLocks noGrp="1"/>
-          </p:cNvSpPr>
-          <p:nvPr>
-            <p:ph idx="1"/>
-          </p:nvPr>
-        </p:nvSpPr>
         <p:spPr>
           <a:xfrm>
             <a:off x="838200" y="1150572"/>
@@ -9395,7 +6985,7 @@
 </p:sld>
 </file>
 
-<file path=ppt/slides/slide24.xml><?xml version="1.0" encoding="utf-8"?>
+<file path=ppt/slides/slide21.xml><?xml version="1.0" encoding="utf-8"?>
 <p:sld xmlns:a="http://schemas.openxmlformats.org/drawingml/2006/main" xmlns:r="http://schemas.openxmlformats.org/officeDocument/2006/relationships" xmlns:p="http://schemas.openxmlformats.org/presentationml/2006/main">
   <p:cSld>
     <p:spTree>
@@ -9637,7 +7227,7 @@
 </p:sld>
 </file>
 
-<file path=ppt/slides/slide25.xml><?xml version="1.0" encoding="utf-8"?>
+<file path=ppt/slides/slide22.xml><?xml version="1.0" encoding="utf-8"?>
 <p:sld xmlns:a="http://schemas.openxmlformats.org/drawingml/2006/main" xmlns:r="http://schemas.openxmlformats.org/officeDocument/2006/relationships" xmlns:p="http://schemas.openxmlformats.org/presentationml/2006/main">
   <p:cSld>
     <p:spTree>
@@ -9971,7 +7561,7 @@
 </p:sld>
 </file>
 
-<file path=ppt/slides/slide26.xml><?xml version="1.0" encoding="utf-8"?>
+<file path=ppt/slides/slide23.xml><?xml version="1.0" encoding="utf-8"?>
 <p:sld xmlns:a="http://schemas.openxmlformats.org/drawingml/2006/main" xmlns:r="http://schemas.openxmlformats.org/officeDocument/2006/relationships" xmlns:p="http://schemas.openxmlformats.org/presentationml/2006/main">
   <p:cSld>
     <p:spTree>
@@ -10283,7 +7873,7 @@
 </p:sld>
 </file>
 
-<file path=ppt/slides/slide27.xml><?xml version="1.0" encoding="utf-8"?>
+<file path=ppt/slides/slide24.xml><?xml version="1.0" encoding="utf-8"?>
 <p:sld xmlns:a="http://schemas.openxmlformats.org/drawingml/2006/main" xmlns:r="http://schemas.openxmlformats.org/officeDocument/2006/relationships" xmlns:p="http://schemas.openxmlformats.org/presentationml/2006/main">
   <p:cSld>
     <p:spTree>
@@ -10653,7 +8243,7 @@
 </p:sld>
 </file>
 
-<file path=ppt/slides/slide28.xml><?xml version="1.0" encoding="utf-8"?>
+<file path=ppt/slides/slide25.xml><?xml version="1.0" encoding="utf-8"?>
 <p:sld xmlns:a="http://schemas.openxmlformats.org/drawingml/2006/main" xmlns:r="http://schemas.openxmlformats.org/officeDocument/2006/relationships" xmlns:p="http://schemas.openxmlformats.org/presentationml/2006/main">
   <p:cSld>
     <p:spTree>
@@ -14418,15 +12008,6 @@
 </file>
 
 <file path=customXml/item2.xml><?xml version="1.0" encoding="utf-8"?>
-<?mso-contentType ?>
-<FormTemplates xmlns="http://schemas.microsoft.com/sharepoint/v3/contenttype/forms">
-  <Display>DocumentLibraryForm</Display>
-  <Edit>DocumentLibraryForm</Edit>
-  <New>DocumentLibraryForm</New>
-</FormTemplates>
-</file>
-
-<file path=customXml/item3.xml><?xml version="1.0" encoding="utf-8"?>
 <ct:contentTypeSchema xmlns:ct="http://schemas.microsoft.com/office/2006/metadata/contentType" xmlns:ma="http://schemas.microsoft.com/office/2006/metadata/properties/metaAttributes" ct:_="" ma:_="" ma:contentTypeName="Document" ma:contentTypeID="0x01010062E8CCA7FB9EAE4D9797B5C1381037FC" ma:contentTypeVersion="9" ma:contentTypeDescription="Create a new document." ma:contentTypeScope="" ma:versionID="020e06b287671e86e91b3e1b12ab4816">
   <xsd:schema xmlns:xsd="http://www.w3.org/2001/XMLSchema" xmlns:xs="http://www.w3.org/2001/XMLSchema" xmlns:p="http://schemas.microsoft.com/office/2006/metadata/properties" xmlns:ns2="83ab252c-4429-4d3c-b354-a26bac7f17c4" targetNamespace="http://schemas.microsoft.com/office/2006/metadata/properties" ma:root="true" ma:fieldsID="a7531f0ded98428dc5aa0cd72d251711" ns2:_="">
     <xsd:import namespace="83ab252c-4429-4d3c-b354-a26bac7f17c4"/>
@@ -14604,6 +12185,15 @@
 </ct:contentTypeSchema>
 </file>
 
+<file path=customXml/item3.xml><?xml version="1.0" encoding="utf-8"?>
+<?mso-contentType ?>
+<FormTemplates xmlns="http://schemas.microsoft.com/sharepoint/v3/contenttype/forms">
+  <Display>DocumentLibraryForm</Display>
+  <Edit>DocumentLibraryForm</Edit>
+  <New>DocumentLibraryForm</New>
+</FormTemplates>
+</file>
+
 <file path=customXml/itemProps1.xml><?xml version="1.0" encoding="utf-8"?>
 <ds:datastoreItem xmlns:ds="http://schemas.openxmlformats.org/officeDocument/2006/customXml" ds:itemID="{3BBD4E3F-366D-4C21-B678-CD16BECA3845}">
   <ds:schemaRefs>
@@ -14614,13 +12204,13 @@
 </file>
 
 <file path=customXml/itemProps2.xml><?xml version="1.0" encoding="utf-8"?>
+<ds:datastoreItem xmlns:ds="http://schemas.openxmlformats.org/officeDocument/2006/customXml" ds:itemID="{73229105-FA7B-40B0-8E0E-68C7FB61AE6D}"/>
+</file>
+
+<file path=customXml/itemProps3.xml><?xml version="1.0" encoding="utf-8"?>
 <ds:datastoreItem xmlns:ds="http://schemas.openxmlformats.org/officeDocument/2006/customXml" ds:itemID="{4CFC1EEA-B388-4EBC-805D-C0D321BA1571}">
   <ds:schemaRefs>
     <ds:schemaRef ds:uri="http://schemas.microsoft.com/sharepoint/v3/contenttype/forms"/>
   </ds:schemaRefs>
 </ds:datastoreItem>
-</file>
-
-<file path=customXml/itemProps3.xml><?xml version="1.0" encoding="utf-8"?>
-<ds:datastoreItem xmlns:ds="http://schemas.openxmlformats.org/officeDocument/2006/customXml" ds:itemID="{C496A269-107D-42A3-AD87-5D8AF7577894}"/>
 </file>
--- a/semaine_08/420905_semaine8.pptx
+++ b/semaine_08/420905_semaine8.pptx
@@ -1825,7 +1825,7 @@
           <a:p>
             <a:fld id="{CFA36C02-C10D-4F70-ADA5-0F3523AD6F2E}" type="datetimeFigureOut">
               <a:rPr lang="fr-CA" smtClean="0"/>
-              <a:t>2022-10-11</a:t>
+              <a:t>2022-10-17</a:t>
             </a:fld>
             <a:endParaRPr lang="fr-CA" dirty="0"/>
           </a:p>
@@ -8287,60 +8287,84 @@
           <a:lstStyle/>
           <a:p>
             <a:r>
-              <a:rPr lang="fr-CA"/>
+              <a:rPr lang="fr-CA" dirty="0"/>
               <a:t> </a:t>
             </a:r>
             <a:r>
-              <a:rPr lang="fr-CA">
+              <a:rPr lang="fr-CA" dirty="0" err="1">
                 <a:solidFill>
                   <a:srgbClr val="FA4098"/>
                 </a:solidFill>
               </a:rPr>
-              <a:t>querySelector()</a:t>
-            </a:r>
-            <a:r>
-              <a:rPr lang="fr-CA"/>
+              <a:t>querySelector</a:t>
+            </a:r>
+            <a:r>
+              <a:rPr lang="fr-CA" dirty="0">
+                <a:solidFill>
+                  <a:srgbClr val="FA4098"/>
+                </a:solidFill>
+              </a:rPr>
+              <a:t>()</a:t>
+            </a:r>
+            <a:r>
+              <a:rPr lang="fr-CA" dirty="0"/>
               <a:t> vs </a:t>
             </a:r>
             <a:r>
-              <a:rPr lang="fr-CA">
+              <a:rPr lang="fr-CA" dirty="0" err="1">
                 <a:solidFill>
                   <a:srgbClr val="FA4098"/>
                 </a:solidFill>
               </a:rPr>
-              <a:t>querySelectorAll()</a:t>
-            </a:r>
-          </a:p>
-          <a:p>
-            <a:endParaRPr lang="fr-CA"/>
+              <a:t>querySelectorAll</a:t>
+            </a:r>
+            <a:r>
+              <a:rPr lang="fr-CA" dirty="0">
+                <a:solidFill>
+                  <a:srgbClr val="FA4098"/>
+                </a:solidFill>
+              </a:rPr>
+              <a:t>()</a:t>
+            </a:r>
+          </a:p>
+          <a:p>
+            <a:endParaRPr lang="fr-CA" dirty="0"/>
           </a:p>
           <a:p>
             <a:pPr lvl="1"/>
             <a:r>
-              <a:rPr lang="fr-CA"/>
+              <a:rPr lang="fr-CA" dirty="0"/>
               <a:t> </a:t>
             </a:r>
             <a:r>
-              <a:rPr lang="fr-CA">
+              <a:rPr lang="fr-CA" dirty="0" err="1">
                 <a:solidFill>
                   <a:srgbClr val="FA4098"/>
                 </a:solidFill>
               </a:rPr>
-              <a:t>querySelector()</a:t>
-            </a:r>
-            <a:r>
-              <a:rPr lang="fr-CA"/>
+              <a:t>querySelector</a:t>
+            </a:r>
+            <a:r>
+              <a:rPr lang="fr-CA" dirty="0">
+                <a:solidFill>
+                  <a:srgbClr val="FA4098"/>
+                </a:solidFill>
+              </a:rPr>
+              <a:t>()</a:t>
+            </a:r>
+            <a:r>
+              <a:rPr lang="fr-CA" dirty="0"/>
               <a:t> permet d’obtenir un seul élément. </a:t>
             </a:r>
           </a:p>
           <a:p>
             <a:pPr lvl="2"/>
             <a:r>
-              <a:rPr lang="fr-CA"/>
+              <a:rPr lang="fr-CA" dirty="0"/>
               <a:t> On s’en sert pour obtenir un élément avec un </a:t>
             </a:r>
             <a:r>
-              <a:rPr lang="fr-CA">
+              <a:rPr lang="fr-CA" dirty="0">
                 <a:solidFill>
                   <a:srgbClr val="FA4098"/>
                 </a:solidFill>
@@ -8348,51 +8372,59 @@
               <a:t>id</a:t>
             </a:r>
             <a:r>
-              <a:rPr lang="fr-CA"/>
+              <a:rPr lang="fr-CA" dirty="0"/>
               <a:t> précis.</a:t>
             </a:r>
           </a:p>
           <a:p>
             <a:pPr lvl="1"/>
-            <a:endParaRPr lang="fr-CA"/>
+            <a:endParaRPr lang="fr-CA" dirty="0"/>
           </a:p>
           <a:p>
             <a:pPr lvl="1"/>
-            <a:endParaRPr lang="fr-CA"/>
+            <a:endParaRPr lang="fr-CA" dirty="0"/>
           </a:p>
           <a:p>
             <a:pPr marL="457200" lvl="1" indent="0">
               <a:buNone/>
             </a:pPr>
-            <a:endParaRPr lang="fr-CA"/>
+            <a:endParaRPr lang="fr-CA" dirty="0"/>
           </a:p>
           <a:p>
             <a:pPr lvl="1"/>
             <a:r>
-              <a:rPr lang="fr-CA"/>
+              <a:rPr lang="fr-CA" dirty="0"/>
               <a:t> </a:t>
             </a:r>
             <a:r>
-              <a:rPr lang="fr-CA">
+              <a:rPr lang="fr-CA" dirty="0" err="1">
                 <a:solidFill>
                   <a:srgbClr val="FA4098"/>
                 </a:solidFill>
               </a:rPr>
-              <a:t>querySelectorAll()</a:t>
-            </a:r>
-            <a:r>
-              <a:rPr lang="fr-CA"/>
+              <a:t>querySelectorAll</a:t>
+            </a:r>
+            <a:r>
+              <a:rPr lang="fr-CA" dirty="0">
+                <a:solidFill>
+                  <a:srgbClr val="FA4098"/>
+                </a:solidFill>
+              </a:rPr>
+              <a:t>()</a:t>
+            </a:r>
+            <a:r>
+              <a:rPr lang="fr-CA" dirty="0"/>
               <a:t> permet d’obtenir un tableau de plusieurs éléments.</a:t>
             </a:r>
           </a:p>
           <a:p>
             <a:pPr lvl="2"/>
             <a:r>
-              <a:rPr lang="fr-CA"/>
+              <a:rPr lang="fr-CA" dirty="0"/>
               <a:t> On s’en sert pour obtenir plusieurs éléments avec une même </a:t>
             </a:r>
             <a:r>
-              <a:rPr lang="fr-CA">
+              <a:rPr lang="fr-CA" dirty="0">
                 <a:solidFill>
                   <a:srgbClr val="FA4098"/>
                 </a:solidFill>
@@ -8400,7 +8432,7 @@
               <a:t>classe</a:t>
             </a:r>
             <a:r>
-              <a:rPr lang="fr-CA"/>
+              <a:rPr lang="fr-CA" dirty="0"/>
               <a:t>.</a:t>
             </a:r>
           </a:p>
@@ -8471,10 +8503,10 @@
       </p:pic>
       <p:pic>
         <p:nvPicPr>
-          <p:cNvPr id="9" name="Image 8">
-            <a:extLst>
-              <a:ext uri="{FF2B5EF4-FFF2-40B4-BE49-F238E27FC236}">
-                <a16:creationId xmlns:a16="http://schemas.microsoft.com/office/drawing/2014/main" id="{57C5751F-B8FB-49F2-8196-8A9A77B04170}"/>
+          <p:cNvPr id="6" name="Image 5">
+            <a:extLst>
+              <a:ext uri="{FF2B5EF4-FFF2-40B4-BE49-F238E27FC236}">
+                <a16:creationId xmlns:a16="http://schemas.microsoft.com/office/drawing/2014/main" id="{7AFCC0BB-C695-48B4-9D86-96AECCEEBEE4}"/>
               </a:ext>
             </a:extLst>
           </p:cNvPr>
@@ -8491,8 +8523,8 @@
         </p:blipFill>
         <p:spPr>
           <a:xfrm>
-            <a:off x="3027611" y="4865203"/>
-            <a:ext cx="6136777" cy="1684450"/>
+            <a:off x="3031485" y="4926483"/>
+            <a:ext cx="6125430" cy="1629002"/>
           </a:xfrm>
           <a:prstGeom prst="rect">
             <a:avLst/>
@@ -12002,14 +12034,8 @@
 </file>
 
 <file path=customXml/item1.xml><?xml version="1.0" encoding="utf-8"?>
-<p:properties xmlns:p="http://schemas.microsoft.com/office/2006/metadata/properties" xmlns:xsi="http://www.w3.org/2001/XMLSchema-instance" xmlns:pc="http://schemas.microsoft.com/office/infopath/2007/PartnerControls">
-  <documentManagement/>
-</p:properties>
-</file>
-
-<file path=customXml/item2.xml><?xml version="1.0" encoding="utf-8"?>
-<ct:contentTypeSchema xmlns:ct="http://schemas.microsoft.com/office/2006/metadata/contentType" xmlns:ma="http://schemas.microsoft.com/office/2006/metadata/properties/metaAttributes" ct:_="" ma:_="" ma:contentTypeName="Document" ma:contentTypeID="0x01010062E8CCA7FB9EAE4D9797B5C1381037FC" ma:contentTypeVersion="9" ma:contentTypeDescription="Create a new document." ma:contentTypeScope="" ma:versionID="020e06b287671e86e91b3e1b12ab4816">
-  <xsd:schema xmlns:xsd="http://www.w3.org/2001/XMLSchema" xmlns:xs="http://www.w3.org/2001/XMLSchema" xmlns:p="http://schemas.microsoft.com/office/2006/metadata/properties" xmlns:ns2="83ab252c-4429-4d3c-b354-a26bac7f17c4" targetNamespace="http://schemas.microsoft.com/office/2006/metadata/properties" ma:root="true" ma:fieldsID="a7531f0ded98428dc5aa0cd72d251711" ns2:_="">
+<ct:contentTypeSchema xmlns:ct="http://schemas.microsoft.com/office/2006/metadata/contentType" xmlns:ma="http://schemas.microsoft.com/office/2006/metadata/properties/metaAttributes" ct:_="" ma:_="" ma:contentTypeName="Document" ma:contentTypeID="0x01010062E8CCA7FB9EAE4D9797B5C1381037FC" ma:contentTypeVersion="9" ma:contentTypeDescription="Crée un document." ma:contentTypeScope="" ma:versionID="170f9b33eac2855c0b5de9b58dbff08d">
+  <xsd:schema xmlns:xsd="http://www.w3.org/2001/XMLSchema" xmlns:xs="http://www.w3.org/2001/XMLSchema" xmlns:p="http://schemas.microsoft.com/office/2006/metadata/properties" xmlns:ns2="83ab252c-4429-4d3c-b354-a26bac7f17c4" targetNamespace="http://schemas.microsoft.com/office/2006/metadata/properties" ma:root="true" ma:fieldsID="9e0ae16a17618a4c9950a6915987a08e" ns2:_="">
     <xsd:import namespace="83ab252c-4429-4d3c-b354-a26bac7f17c4"/>
     <xsd:element name="properties">
       <xsd:complexType>
@@ -12095,8 +12121,8 @@
         <xsd:element ref="dc:creator" minOccurs="0" maxOccurs="1"/>
         <xsd:element ref="dcterms:created" minOccurs="0" maxOccurs="1"/>
         <xsd:element ref="dc:identifier" minOccurs="0" maxOccurs="1"/>
-        <xsd:element name="contentType" minOccurs="0" maxOccurs="1" type="xsd:string" ma:index="0" ma:displayName="Content Type"/>
-        <xsd:element ref="dc:title" minOccurs="0" maxOccurs="1" ma:index="4" ma:displayName="Title"/>
+        <xsd:element name="contentType" minOccurs="0" maxOccurs="1" type="xsd:string" ma:index="0" ma:displayName="Type de contenu"/>
+        <xsd:element ref="dc:title" minOccurs="0" maxOccurs="1" ma:index="4" ma:displayName="Titre"/>
         <xsd:element ref="dc:subject" minOccurs="0" maxOccurs="1"/>
         <xsd:element ref="dc:description" minOccurs="0" maxOccurs="1"/>
         <xsd:element name="keywords" minOccurs="0" maxOccurs="1" type="xsd:string"/>
@@ -12185,6 +12211,12 @@
 </ct:contentTypeSchema>
 </file>
 
+<file path=customXml/item2.xml><?xml version="1.0" encoding="utf-8"?>
+<p:properties xmlns:p="http://schemas.microsoft.com/office/2006/metadata/properties" xmlns:xsi="http://www.w3.org/2001/XMLSchema-instance" xmlns:pc="http://schemas.microsoft.com/office/infopath/2007/PartnerControls">
+  <documentManagement/>
+</p:properties>
+</file>
+
 <file path=customXml/item3.xml><?xml version="1.0" encoding="utf-8"?>
 <?mso-contentType ?>
 <FormTemplates xmlns="http://schemas.microsoft.com/sharepoint/v3/contenttype/forms">
@@ -12195,16 +12227,16 @@
 </file>
 
 <file path=customXml/itemProps1.xml><?xml version="1.0" encoding="utf-8"?>
+<ds:datastoreItem xmlns:ds="http://schemas.openxmlformats.org/officeDocument/2006/customXml" ds:itemID="{54BB8CB0-21FE-42F5-BDD5-86382B4CE4CC}"/>
+</file>
+
+<file path=customXml/itemProps2.xml><?xml version="1.0" encoding="utf-8"?>
 <ds:datastoreItem xmlns:ds="http://schemas.openxmlformats.org/officeDocument/2006/customXml" ds:itemID="{3BBD4E3F-366D-4C21-B678-CD16BECA3845}">
   <ds:schemaRefs>
     <ds:schemaRef ds:uri="http://schemas.microsoft.com/office/2006/metadata/properties"/>
     <ds:schemaRef ds:uri="http://schemas.microsoft.com/office/infopath/2007/PartnerControls"/>
   </ds:schemaRefs>
 </ds:datastoreItem>
-</file>
-
-<file path=customXml/itemProps2.xml><?xml version="1.0" encoding="utf-8"?>
-<ds:datastoreItem xmlns:ds="http://schemas.openxmlformats.org/officeDocument/2006/customXml" ds:itemID="{73229105-FA7B-40B0-8E0E-68C7FB61AE6D}"/>
 </file>
 
 <file path=customXml/itemProps3.xml><?xml version="1.0" encoding="utf-8"?>
